--- a/2026_М_ПІ_ІПЗздм-24-1_Захаров_Ю_Ю.pptx
+++ b/2026_М_ПІ_ІПЗздм-24-1_Захаров_Ю_Ю.pptx
@@ -1,6 +1,6 @@
 
 <file path=ppt/presentation.xml><?xml version="1.0" encoding="utf-8"?>
-<p:presentation xmlns:a="http://schemas.openxmlformats.org/drawingml/2006/main" xmlns:r="http://schemas.openxmlformats.org/officeDocument/2006/relationships" xmlns:mc="http://schemas.openxmlformats.org/markup-compatibility/2006" xmlns:mv="urn:schemas-microsoft-com:mac:vml" xmlns:p="http://schemas.openxmlformats.org/presentationml/2006/main" xmlns:c="http://schemas.openxmlformats.org/drawingml/2006/chart" xmlns:dgm="http://schemas.openxmlformats.org/drawingml/2006/diagram" xmlns:o="urn:schemas-microsoft-com:office:office" xmlns:v="urn:schemas-microsoft-com:vml" xmlns:pvml="urn:schemas-microsoft-com:office:powerpoint" xmlns:com="http://schemas.openxmlformats.org/drawingml/2006/compatibility" xmlns:p14="http://schemas.microsoft.com/office/powerpoint/2010/main" xmlns:p15="http://schemas.microsoft.com/office/powerpoint/2012/main" xmlns:ahyp="http://schemas.microsoft.com/office/drawing/2018/hyperlinkcolor" autoCompressPictures="0" embedTrueTypeFonts="1" strictFirstAndLastChars="0" saveSubsetFonts="1">
+<p:presentation xmlns:a="http://schemas.openxmlformats.org/drawingml/2006/main" xmlns:r="http://schemas.openxmlformats.org/officeDocument/2006/relationships" xmlns:mc="http://schemas.openxmlformats.org/markup-compatibility/2006" xmlns:mv="urn:schemas-microsoft-com:mac:vml" xmlns:p="http://schemas.openxmlformats.org/presentationml/2006/main" xmlns:c="http://schemas.openxmlformats.org/drawingml/2006/chart" xmlns:dgm="http://schemas.openxmlformats.org/drawingml/2006/diagram" xmlns:o="urn:schemas-microsoft-com:office:office" xmlns:v="urn:schemas-microsoft-com:vml" xmlns:pvml="urn:schemas-microsoft-com:office:powerpoint" xmlns:com="http://schemas.openxmlformats.org/drawingml/2006/compatibility" xmlns:p14="http://schemas.microsoft.com/office/powerpoint/2010/main" xmlns:p15="http://schemas.microsoft.com/office/powerpoint/2012/main" xmlns:ahyp="http://schemas.microsoft.com/office/drawing/2018/hyperlinkcolor" autoCompressPictures="0" embedTrueTypeFonts="1" strictFirstAndLastChars="0" saveSubsetFonts="1" showSpecialPlsOnTitleSld="0">
   <p:sldMasterIdLst>
     <p:sldMasterId id="2147483648" r:id="rId4"/>
   </p:sldMasterIdLst>
@@ -279,7 +279,7 @@
       </p15:sldGuideLst>
     </p:ext>
     <p:ext uri="GoogleSlidesCustomDataVersion2">
-      <go:slidesCustomData xmlns:go="http://customooxmlschemas.google.com/" r:id="rId24" roundtripDataSignature="AMtx7mg9Ta/zAakkPXT02+nxxooTQoNeTg=="/>
+      <go:slidesCustomData xmlns:go="http://customooxmlschemas.google.com/" r:id="rId24" roundtripDataSignature="AMtx7mh02aR7HISUhObRe5bcq5KdbCvReA=="/>
     </p:ext>
   </p:extLst>
 </p:presentation>
@@ -968,7 +968,7 @@
   <p:cSld>
     <p:spTree>
       <p:nvGrpSpPr>
-        <p:cNvPr id="192" name="Shape 192"/>
+        <p:cNvPr id="200" name="Shape 200"/>
         <p:cNvGrpSpPr/>
         <p:nvPr/>
       </p:nvGrpSpPr>
@@ -982,7 +982,7 @@
       </p:grpSpPr>
       <p:sp>
         <p:nvSpPr>
-          <p:cNvPr id="193" name="Google Shape;193;p10:notes"/>
+          <p:cNvPr id="201" name="Google Shape;201;p10:notes"/>
           <p:cNvSpPr/>
           <p:nvPr>
             <p:ph idx="2" type="sldImg"/>
@@ -1027,7 +1027,7 @@
       </p:sp>
       <p:sp>
         <p:nvSpPr>
-          <p:cNvPr id="194" name="Google Shape;194;p10:notes"/>
+          <p:cNvPr id="202" name="Google Shape;202;p10:notes"/>
           <p:cNvSpPr txBox="1"/>
           <p:nvPr>
             <p:ph idx="1" type="body"/>
@@ -1085,7 +1085,7 @@
   <p:cSld>
     <p:spTree>
       <p:nvGrpSpPr>
-        <p:cNvPr id="199" name="Shape 199"/>
+        <p:cNvPr id="208" name="Shape 208"/>
         <p:cNvGrpSpPr/>
         <p:nvPr/>
       </p:nvGrpSpPr>
@@ -1099,7 +1099,7 @@
       </p:grpSpPr>
       <p:sp>
         <p:nvSpPr>
-          <p:cNvPr id="200" name="Google Shape;200;g3d08dcc0f4b_0_0:notes"/>
+          <p:cNvPr id="209" name="Google Shape;209;g3d08dcc0f4b_0_0:notes"/>
           <p:cNvSpPr/>
           <p:nvPr>
             <p:ph idx="2" type="sldImg"/>
@@ -1134,7 +1134,7 @@
       </p:sp>
       <p:sp>
         <p:nvSpPr>
-          <p:cNvPr id="201" name="Google Shape;201;g3d08dcc0f4b_0_0:notes"/>
+          <p:cNvPr id="210" name="Google Shape;210;g3d08dcc0f4b_0_0:notes"/>
           <p:cNvSpPr txBox="1"/>
           <p:nvPr>
             <p:ph idx="1" type="body"/>
@@ -1184,7 +1184,7 @@
   <p:cSld>
     <p:spTree>
       <p:nvGrpSpPr>
-        <p:cNvPr id="206" name="Shape 206"/>
+        <p:cNvPr id="216" name="Shape 216"/>
         <p:cNvGrpSpPr/>
         <p:nvPr/>
       </p:nvGrpSpPr>
@@ -1198,7 +1198,7 @@
       </p:grpSpPr>
       <p:sp>
         <p:nvSpPr>
-          <p:cNvPr id="207" name="Google Shape;207;g3d08dcc0f4b_0_8:notes"/>
+          <p:cNvPr id="217" name="Google Shape;217;g3d08dcc0f4b_0_8:notes"/>
           <p:cNvSpPr/>
           <p:nvPr>
             <p:ph idx="2" type="sldImg"/>
@@ -1233,7 +1233,7 @@
       </p:sp>
       <p:sp>
         <p:nvSpPr>
-          <p:cNvPr id="208" name="Google Shape;208;g3d08dcc0f4b_0_8:notes"/>
+          <p:cNvPr id="218" name="Google Shape;218;g3d08dcc0f4b_0_8:notes"/>
           <p:cNvSpPr txBox="1"/>
           <p:nvPr>
             <p:ph idx="1" type="body"/>
@@ -1283,7 +1283,7 @@
   <p:cSld>
     <p:spTree>
       <p:nvGrpSpPr>
-        <p:cNvPr id="213" name="Shape 213"/>
+        <p:cNvPr id="224" name="Shape 224"/>
         <p:cNvGrpSpPr/>
         <p:nvPr/>
       </p:nvGrpSpPr>
@@ -1297,7 +1297,7 @@
       </p:grpSpPr>
       <p:sp>
         <p:nvSpPr>
-          <p:cNvPr id="214" name="Google Shape;214;p11:notes"/>
+          <p:cNvPr id="225" name="Google Shape;225;p11:notes"/>
           <p:cNvSpPr/>
           <p:nvPr>
             <p:ph idx="2" type="sldImg"/>
@@ -1342,7 +1342,7 @@
       </p:sp>
       <p:sp>
         <p:nvSpPr>
-          <p:cNvPr id="215" name="Google Shape;215;p11:notes"/>
+          <p:cNvPr id="226" name="Google Shape;226;p11:notes"/>
           <p:cNvSpPr txBox="1"/>
           <p:nvPr>
             <p:ph idx="1" type="body"/>
@@ -1400,7 +1400,7 @@
   <p:cSld>
     <p:spTree>
       <p:nvGrpSpPr>
-        <p:cNvPr id="219" name="Shape 219"/>
+        <p:cNvPr id="231" name="Shape 231"/>
         <p:cNvGrpSpPr/>
         <p:nvPr/>
       </p:nvGrpSpPr>
@@ -1414,7 +1414,7 @@
       </p:grpSpPr>
       <p:sp>
         <p:nvSpPr>
-          <p:cNvPr id="220" name="Google Shape;220;p12:notes"/>
+          <p:cNvPr id="232" name="Google Shape;232;p12:notes"/>
           <p:cNvSpPr/>
           <p:nvPr>
             <p:ph idx="2" type="sldImg"/>
@@ -1459,7 +1459,7 @@
       </p:sp>
       <p:sp>
         <p:nvSpPr>
-          <p:cNvPr id="221" name="Google Shape;221;p12:notes"/>
+          <p:cNvPr id="233" name="Google Shape;233;p12:notes"/>
           <p:cNvSpPr txBox="1"/>
           <p:nvPr>
             <p:ph idx="1" type="body"/>
@@ -1634,7 +1634,7 @@
   <p:cSld>
     <p:spTree>
       <p:nvGrpSpPr>
-        <p:cNvPr id="136" name="Shape 136"/>
+        <p:cNvPr id="137" name="Shape 137"/>
         <p:cNvGrpSpPr/>
         <p:nvPr/>
       </p:nvGrpSpPr>
@@ -1648,7 +1648,7 @@
       </p:grpSpPr>
       <p:sp>
         <p:nvSpPr>
-          <p:cNvPr id="137" name="Google Shape;137;p3:notes"/>
+          <p:cNvPr id="138" name="Google Shape;138;p3:notes"/>
           <p:cNvSpPr/>
           <p:nvPr>
             <p:ph idx="2" type="sldImg"/>
@@ -1693,7 +1693,7 @@
       </p:sp>
       <p:sp>
         <p:nvSpPr>
-          <p:cNvPr id="138" name="Google Shape;138;p3:notes"/>
+          <p:cNvPr id="139" name="Google Shape;139;p3:notes"/>
           <p:cNvSpPr txBox="1"/>
           <p:nvPr>
             <p:ph idx="1" type="body"/>
@@ -1751,7 +1751,7 @@
   <p:cSld>
     <p:spTree>
       <p:nvGrpSpPr>
-        <p:cNvPr id="143" name="Shape 143"/>
+        <p:cNvPr id="145" name="Shape 145"/>
         <p:cNvGrpSpPr/>
         <p:nvPr/>
       </p:nvGrpSpPr>
@@ -1765,7 +1765,7 @@
       </p:grpSpPr>
       <p:sp>
         <p:nvSpPr>
-          <p:cNvPr id="144" name="Google Shape;144;p4:notes"/>
+          <p:cNvPr id="146" name="Google Shape;146;p4:notes"/>
           <p:cNvSpPr/>
           <p:nvPr>
             <p:ph idx="2" type="sldImg"/>
@@ -1810,7 +1810,7 @@
       </p:sp>
       <p:sp>
         <p:nvSpPr>
-          <p:cNvPr id="145" name="Google Shape;145;p4:notes"/>
+          <p:cNvPr id="147" name="Google Shape;147;p4:notes"/>
           <p:cNvSpPr txBox="1"/>
           <p:nvPr>
             <p:ph idx="1" type="body"/>
@@ -1868,7 +1868,7 @@
   <p:cSld>
     <p:spTree>
       <p:nvGrpSpPr>
-        <p:cNvPr id="149" name="Shape 149"/>
+        <p:cNvPr id="152" name="Shape 152"/>
         <p:cNvGrpSpPr/>
         <p:nvPr/>
       </p:nvGrpSpPr>
@@ -1882,7 +1882,7 @@
       </p:grpSpPr>
       <p:sp>
         <p:nvSpPr>
-          <p:cNvPr id="150" name="Google Shape;150;p5:notes"/>
+          <p:cNvPr id="153" name="Google Shape;153;p5:notes"/>
           <p:cNvSpPr/>
           <p:nvPr>
             <p:ph idx="2" type="sldImg"/>
@@ -1927,7 +1927,7 @@
       </p:sp>
       <p:sp>
         <p:nvSpPr>
-          <p:cNvPr id="151" name="Google Shape;151;p5:notes"/>
+          <p:cNvPr id="154" name="Google Shape;154;p5:notes"/>
           <p:cNvSpPr txBox="1"/>
           <p:nvPr>
             <p:ph idx="1" type="body"/>
@@ -1985,7 +1985,7 @@
   <p:cSld>
     <p:spTree>
       <p:nvGrpSpPr>
-        <p:cNvPr id="155" name="Shape 155"/>
+        <p:cNvPr id="159" name="Shape 159"/>
         <p:cNvGrpSpPr/>
         <p:nvPr/>
       </p:nvGrpSpPr>
@@ -1999,7 +1999,7 @@
       </p:grpSpPr>
       <p:sp>
         <p:nvSpPr>
-          <p:cNvPr id="156" name="Google Shape;156;p6:notes"/>
+          <p:cNvPr id="160" name="Google Shape;160;p6:notes"/>
           <p:cNvSpPr/>
           <p:nvPr>
             <p:ph idx="2" type="sldImg"/>
@@ -2044,7 +2044,7 @@
       </p:sp>
       <p:sp>
         <p:nvSpPr>
-          <p:cNvPr id="157" name="Google Shape;157;p6:notes"/>
+          <p:cNvPr id="161" name="Google Shape;161;p6:notes"/>
           <p:cNvSpPr txBox="1"/>
           <p:nvPr>
             <p:ph idx="1" type="body"/>
@@ -2102,7 +2102,7 @@
   <p:cSld>
     <p:spTree>
       <p:nvGrpSpPr>
-        <p:cNvPr id="161" name="Shape 161"/>
+        <p:cNvPr id="166" name="Shape 166"/>
         <p:cNvGrpSpPr/>
         <p:nvPr/>
       </p:nvGrpSpPr>
@@ -2116,7 +2116,7 @@
       </p:grpSpPr>
       <p:sp>
         <p:nvSpPr>
-          <p:cNvPr id="162" name="Google Shape;162;p7:notes"/>
+          <p:cNvPr id="167" name="Google Shape;167;p7:notes"/>
           <p:cNvSpPr/>
           <p:nvPr>
             <p:ph idx="2" type="sldImg"/>
@@ -2161,7 +2161,7 @@
       </p:sp>
       <p:sp>
         <p:nvSpPr>
-          <p:cNvPr id="163" name="Google Shape;163;p7:notes"/>
+          <p:cNvPr id="168" name="Google Shape;168;p7:notes"/>
           <p:cNvSpPr txBox="1"/>
           <p:nvPr>
             <p:ph idx="1" type="body"/>
@@ -2219,7 +2219,7 @@
   <p:cSld>
     <p:spTree>
       <p:nvGrpSpPr>
-        <p:cNvPr id="178" name="Shape 178"/>
+        <p:cNvPr id="184" name="Shape 184"/>
         <p:cNvGrpSpPr/>
         <p:nvPr/>
       </p:nvGrpSpPr>
@@ -2233,7 +2233,7 @@
       </p:grpSpPr>
       <p:sp>
         <p:nvSpPr>
-          <p:cNvPr id="179" name="Google Shape;179;p8:notes"/>
+          <p:cNvPr id="185" name="Google Shape;185;p8:notes"/>
           <p:cNvSpPr/>
           <p:nvPr>
             <p:ph idx="2" type="sldImg"/>
@@ -2278,7 +2278,7 @@
       </p:sp>
       <p:sp>
         <p:nvSpPr>
-          <p:cNvPr id="180" name="Google Shape;180;p8:notes"/>
+          <p:cNvPr id="186" name="Google Shape;186;p8:notes"/>
           <p:cNvSpPr txBox="1"/>
           <p:nvPr>
             <p:ph idx="1" type="body"/>
@@ -2336,7 +2336,7 @@
   <p:cSld>
     <p:spTree>
       <p:nvGrpSpPr>
-        <p:cNvPr id="185" name="Shape 185"/>
+        <p:cNvPr id="192" name="Shape 192"/>
         <p:cNvGrpSpPr/>
         <p:nvPr/>
       </p:nvGrpSpPr>
@@ -2350,7 +2350,7 @@
       </p:grpSpPr>
       <p:sp>
         <p:nvSpPr>
-          <p:cNvPr id="186" name="Google Shape;186;p9:notes"/>
+          <p:cNvPr id="193" name="Google Shape;193;p9:notes"/>
           <p:cNvSpPr/>
           <p:nvPr>
             <p:ph idx="2" type="sldImg"/>
@@ -2395,7 +2395,7 @@
       </p:sp>
       <p:sp>
         <p:nvSpPr>
-          <p:cNvPr id="187" name="Google Shape;187;p9:notes"/>
+          <p:cNvPr id="194" name="Google Shape;194;p9:notes"/>
           <p:cNvSpPr txBox="1"/>
           <p:nvPr>
             <p:ph idx="1" type="body"/>
@@ -13698,7 +13698,7 @@
       </p:transition>
     </mc:Fallback>
   </mc:AlternateContent>
-  <p:hf dt="0" ftr="0" hdr="0" sldNum="0"/>
+  <p:hf dt="0" ftr="0" hdr="0"/>
   <p:txStyles>
     <p:titleStyle>
       <a:defPPr lvl="0" marR="0" rtl="0" algn="l">
@@ -14669,7 +14669,7 @@
   <p:cSld>
     <p:spTree>
       <p:nvGrpSpPr>
-        <p:cNvPr id="195" name="Shape 195"/>
+        <p:cNvPr id="203" name="Shape 203"/>
         <p:cNvGrpSpPr/>
         <p:nvPr/>
       </p:nvGrpSpPr>
@@ -14683,7 +14683,7 @@
       </p:grpSpPr>
       <p:sp>
         <p:nvSpPr>
-          <p:cNvPr id="196" name="Google Shape;196;p10"/>
+          <p:cNvPr id="204" name="Google Shape;204;p10"/>
           <p:cNvSpPr txBox="1"/>
           <p:nvPr>
             <p:ph type="title"/>
@@ -14731,7 +14731,7 @@
       </p:sp>
       <p:sp>
         <p:nvSpPr>
-          <p:cNvPr id="197" name="Google Shape;197;p10"/>
+          <p:cNvPr id="205" name="Google Shape;205;p10"/>
           <p:cNvSpPr txBox="1"/>
           <p:nvPr/>
         </p:nvSpPr>
@@ -14837,7 +14837,7 @@
       </p:sp>
       <p:pic>
         <p:nvPicPr>
-          <p:cNvPr id="198" name="Google Shape;198;p10"/>
+          <p:cNvPr id="206" name="Google Shape;206;p10"/>
           <p:cNvPicPr preferRelativeResize="0"/>
           <p:nvPr/>
         </p:nvPicPr>
@@ -14869,6 +14869,51 @@
           </a:ln>
         </p:spPr>
       </p:pic>
+      <p:sp>
+        <p:nvSpPr>
+          <p:cNvPr id="207" name="Google Shape;207;p10"/>
+          <p:cNvSpPr txBox="1"/>
+          <p:nvPr>
+            <p:ph idx="12" type="sldNum"/>
+          </p:nvPr>
+        </p:nvSpPr>
+        <p:spPr>
+          <a:xfrm>
+            <a:off x="8390734" y="4543668"/>
+            <a:ext cx="548700" cy="393600"/>
+          </a:xfrm>
+          <a:prstGeom prst="rect">
+            <a:avLst/>
+          </a:prstGeom>
+        </p:spPr>
+        <p:txBody>
+          <a:bodyPr anchorCtr="0" anchor="ctr" bIns="91425" lIns="91425" spcFirstLastPara="1" rIns="91425" wrap="square" tIns="91425">
+            <a:normAutofit/>
+          </a:bodyPr>
+          <a:lstStyle/>
+          <a:p>
+            <a:pPr indent="0" lvl="0" marL="0" rtl="0" algn="r">
+              <a:spcBef>
+                <a:spcPts val="0"/>
+              </a:spcBef>
+              <a:spcAft>
+                <a:spcPts val="0"/>
+              </a:spcAft>
+              <a:buClr>
+                <a:srgbClr val="000000"/>
+              </a:buClr>
+              <a:buSzPts val="1000"/>
+              <a:buFont typeface="Arial"/>
+              <a:buNone/>
+            </a:pPr>
+            <a:fld id="{00000000-1234-1234-1234-123412341234}" type="slidenum">
+              <a:rPr lang="uk"/>
+              <a:t>‹#›</a:t>
+            </a:fld>
+            <a:endParaRPr/>
+          </a:p>
+        </p:txBody>
+      </p:sp>
     </p:spTree>
   </p:cSld>
   <p:clrMapOvr>
@@ -14882,7 +14927,7 @@
   <p:cSld>
     <p:spTree>
       <p:nvGrpSpPr>
-        <p:cNvPr id="202" name="Shape 202"/>
+        <p:cNvPr id="211" name="Shape 211"/>
         <p:cNvGrpSpPr/>
         <p:nvPr/>
       </p:nvGrpSpPr>
@@ -14896,7 +14941,7 @@
       </p:grpSpPr>
       <p:sp>
         <p:nvSpPr>
-          <p:cNvPr id="203" name="Google Shape;203;g3d08dcc0f4b_0_0"/>
+          <p:cNvPr id="212" name="Google Shape;212;g3d08dcc0f4b_0_0"/>
           <p:cNvSpPr txBox="1"/>
           <p:nvPr>
             <p:ph type="title"/>
@@ -14936,7 +14981,7 @@
       </p:sp>
       <p:sp>
         <p:nvSpPr>
-          <p:cNvPr id="204" name="Google Shape;204;g3d08dcc0f4b_0_0"/>
+          <p:cNvPr id="213" name="Google Shape;213;g3d08dcc0f4b_0_0"/>
           <p:cNvSpPr txBox="1"/>
           <p:nvPr/>
         </p:nvSpPr>
@@ -14981,7 +15026,7 @@
       </p:sp>
       <p:pic>
         <p:nvPicPr>
-          <p:cNvPr id="205" name="Google Shape;205;g3d08dcc0f4b_0_0"/>
+          <p:cNvPr id="214" name="Google Shape;214;g3d08dcc0f4b_0_0"/>
           <p:cNvPicPr preferRelativeResize="0"/>
           <p:nvPr/>
         </p:nvPicPr>
@@ -15013,6 +15058,51 @@
           </a:ln>
         </p:spPr>
       </p:pic>
+      <p:sp>
+        <p:nvSpPr>
+          <p:cNvPr id="215" name="Google Shape;215;g3d08dcc0f4b_0_0"/>
+          <p:cNvSpPr txBox="1"/>
+          <p:nvPr>
+            <p:ph idx="12" type="sldNum"/>
+          </p:nvPr>
+        </p:nvSpPr>
+        <p:spPr>
+          <a:xfrm>
+            <a:off x="8390734" y="4543668"/>
+            <a:ext cx="548700" cy="393600"/>
+          </a:xfrm>
+          <a:prstGeom prst="rect">
+            <a:avLst/>
+          </a:prstGeom>
+        </p:spPr>
+        <p:txBody>
+          <a:bodyPr anchorCtr="0" anchor="ctr" bIns="91425" lIns="91425" spcFirstLastPara="1" rIns="91425" wrap="square" tIns="91425">
+            <a:normAutofit/>
+          </a:bodyPr>
+          <a:lstStyle/>
+          <a:p>
+            <a:pPr indent="0" lvl="0" marL="0" rtl="0" algn="r">
+              <a:spcBef>
+                <a:spcPts val="0"/>
+              </a:spcBef>
+              <a:spcAft>
+                <a:spcPts val="0"/>
+              </a:spcAft>
+              <a:buClr>
+                <a:srgbClr val="000000"/>
+              </a:buClr>
+              <a:buSzPts val="1000"/>
+              <a:buFont typeface="Arial"/>
+              <a:buNone/>
+            </a:pPr>
+            <a:fld id="{00000000-1234-1234-1234-123412341234}" type="slidenum">
+              <a:rPr lang="uk"/>
+              <a:t>‹#›</a:t>
+            </a:fld>
+            <a:endParaRPr/>
+          </a:p>
+        </p:txBody>
+      </p:sp>
     </p:spTree>
   </p:cSld>
   <p:clrMapOvr>
@@ -15026,7 +15116,7 @@
   <p:cSld>
     <p:spTree>
       <p:nvGrpSpPr>
-        <p:cNvPr id="209" name="Shape 209"/>
+        <p:cNvPr id="219" name="Shape 219"/>
         <p:cNvGrpSpPr/>
         <p:nvPr/>
       </p:nvGrpSpPr>
@@ -15040,7 +15130,7 @@
       </p:grpSpPr>
       <p:sp>
         <p:nvSpPr>
-          <p:cNvPr id="210" name="Google Shape;210;g3d08dcc0f4b_0_8"/>
+          <p:cNvPr id="220" name="Google Shape;220;g3d08dcc0f4b_0_8"/>
           <p:cNvSpPr txBox="1"/>
           <p:nvPr>
             <p:ph type="title"/>
@@ -15080,7 +15170,7 @@
       </p:sp>
       <p:sp>
         <p:nvSpPr>
-          <p:cNvPr id="211" name="Google Shape;211;g3d08dcc0f4b_0_8"/>
+          <p:cNvPr id="221" name="Google Shape;221;g3d08dcc0f4b_0_8"/>
           <p:cNvSpPr txBox="1"/>
           <p:nvPr/>
         </p:nvSpPr>
@@ -15125,7 +15215,7 @@
       </p:sp>
       <p:pic>
         <p:nvPicPr>
-          <p:cNvPr id="212" name="Google Shape;212;g3d08dcc0f4b_0_8"/>
+          <p:cNvPr id="222" name="Google Shape;222;g3d08dcc0f4b_0_8"/>
           <p:cNvPicPr preferRelativeResize="0"/>
           <p:nvPr/>
         </p:nvPicPr>
@@ -15157,6 +15247,51 @@
           </a:ln>
         </p:spPr>
       </p:pic>
+      <p:sp>
+        <p:nvSpPr>
+          <p:cNvPr id="223" name="Google Shape;223;g3d08dcc0f4b_0_8"/>
+          <p:cNvSpPr txBox="1"/>
+          <p:nvPr>
+            <p:ph idx="12" type="sldNum"/>
+          </p:nvPr>
+        </p:nvSpPr>
+        <p:spPr>
+          <a:xfrm>
+            <a:off x="8390734" y="4543668"/>
+            <a:ext cx="548700" cy="393600"/>
+          </a:xfrm>
+          <a:prstGeom prst="rect">
+            <a:avLst/>
+          </a:prstGeom>
+        </p:spPr>
+        <p:txBody>
+          <a:bodyPr anchorCtr="0" anchor="ctr" bIns="91425" lIns="91425" spcFirstLastPara="1" rIns="91425" wrap="square" tIns="91425">
+            <a:normAutofit/>
+          </a:bodyPr>
+          <a:lstStyle/>
+          <a:p>
+            <a:pPr indent="0" lvl="0" marL="0" rtl="0" algn="r">
+              <a:spcBef>
+                <a:spcPts val="0"/>
+              </a:spcBef>
+              <a:spcAft>
+                <a:spcPts val="0"/>
+              </a:spcAft>
+              <a:buClr>
+                <a:srgbClr val="000000"/>
+              </a:buClr>
+              <a:buSzPts val="1000"/>
+              <a:buFont typeface="Arial"/>
+              <a:buNone/>
+            </a:pPr>
+            <a:fld id="{00000000-1234-1234-1234-123412341234}" type="slidenum">
+              <a:rPr lang="uk"/>
+              <a:t>‹#›</a:t>
+            </a:fld>
+            <a:endParaRPr/>
+          </a:p>
+        </p:txBody>
+      </p:sp>
     </p:spTree>
   </p:cSld>
   <p:clrMapOvr>
@@ -15170,7 +15305,7 @@
   <p:cSld>
     <p:spTree>
       <p:nvGrpSpPr>
-        <p:cNvPr id="216" name="Shape 216"/>
+        <p:cNvPr id="227" name="Shape 227"/>
         <p:cNvGrpSpPr/>
         <p:nvPr/>
       </p:nvGrpSpPr>
@@ -15184,7 +15319,7 @@
       </p:grpSpPr>
       <p:sp>
         <p:nvSpPr>
-          <p:cNvPr id="217" name="Google Shape;217;p11"/>
+          <p:cNvPr id="228" name="Google Shape;228;p11"/>
           <p:cNvSpPr txBox="1"/>
           <p:nvPr>
             <p:ph type="title"/>
@@ -15232,7 +15367,7 @@
       </p:sp>
       <p:sp>
         <p:nvSpPr>
-          <p:cNvPr id="218" name="Google Shape;218;p11"/>
+          <p:cNvPr id="229" name="Google Shape;229;p11"/>
           <p:cNvSpPr txBox="1"/>
           <p:nvPr/>
         </p:nvSpPr>
@@ -15296,6 +15431,51 @@
           </a:p>
         </p:txBody>
       </p:sp>
+      <p:sp>
+        <p:nvSpPr>
+          <p:cNvPr id="230" name="Google Shape;230;p11"/>
+          <p:cNvSpPr txBox="1"/>
+          <p:nvPr>
+            <p:ph idx="12" type="sldNum"/>
+          </p:nvPr>
+        </p:nvSpPr>
+        <p:spPr>
+          <a:xfrm>
+            <a:off x="8390734" y="4543668"/>
+            <a:ext cx="548700" cy="393600"/>
+          </a:xfrm>
+          <a:prstGeom prst="rect">
+            <a:avLst/>
+          </a:prstGeom>
+        </p:spPr>
+        <p:txBody>
+          <a:bodyPr anchorCtr="0" anchor="ctr" bIns="91425" lIns="91425" spcFirstLastPara="1" rIns="91425" wrap="square" tIns="91425">
+            <a:normAutofit/>
+          </a:bodyPr>
+          <a:lstStyle/>
+          <a:p>
+            <a:pPr indent="0" lvl="0" marL="0" rtl="0" algn="r">
+              <a:spcBef>
+                <a:spcPts val="0"/>
+              </a:spcBef>
+              <a:spcAft>
+                <a:spcPts val="0"/>
+              </a:spcAft>
+              <a:buClr>
+                <a:srgbClr val="000000"/>
+              </a:buClr>
+              <a:buSzPts val="1000"/>
+              <a:buFont typeface="Arial"/>
+              <a:buNone/>
+            </a:pPr>
+            <a:fld id="{00000000-1234-1234-1234-123412341234}" type="slidenum">
+              <a:rPr lang="uk"/>
+              <a:t>‹#›</a:t>
+            </a:fld>
+            <a:endParaRPr/>
+          </a:p>
+        </p:txBody>
+      </p:sp>
     </p:spTree>
   </p:cSld>
   <p:clrMapOvr>
@@ -15309,7 +15489,7 @@
   <p:cSld>
     <p:spTree>
       <p:nvGrpSpPr>
-        <p:cNvPr id="222" name="Shape 222"/>
+        <p:cNvPr id="234" name="Shape 234"/>
         <p:cNvGrpSpPr/>
         <p:nvPr/>
       </p:nvGrpSpPr>
@@ -15323,7 +15503,7 @@
       </p:grpSpPr>
       <p:sp>
         <p:nvSpPr>
-          <p:cNvPr id="223" name="Google Shape;223;p12"/>
+          <p:cNvPr id="235" name="Google Shape;235;p12"/>
           <p:cNvSpPr txBox="1"/>
           <p:nvPr>
             <p:ph type="title"/>
@@ -15365,6 +15545,51 @@
               <a:rPr lang="uk"/>
               <a:t>Дякую за увагу!</a:t>
             </a:r>
+            <a:endParaRPr/>
+          </a:p>
+        </p:txBody>
+      </p:sp>
+      <p:sp>
+        <p:nvSpPr>
+          <p:cNvPr id="236" name="Google Shape;236;p12"/>
+          <p:cNvSpPr txBox="1"/>
+          <p:nvPr>
+            <p:ph idx="12" type="sldNum"/>
+          </p:nvPr>
+        </p:nvSpPr>
+        <p:spPr>
+          <a:xfrm>
+            <a:off x="8390734" y="4543668"/>
+            <a:ext cx="548700" cy="393600"/>
+          </a:xfrm>
+          <a:prstGeom prst="rect">
+            <a:avLst/>
+          </a:prstGeom>
+        </p:spPr>
+        <p:txBody>
+          <a:bodyPr anchorCtr="0" anchor="ctr" bIns="91425" lIns="91425" spcFirstLastPara="1" rIns="91425" wrap="square" tIns="91425">
+            <a:normAutofit/>
+          </a:bodyPr>
+          <a:lstStyle/>
+          <a:p>
+            <a:pPr indent="0" lvl="0" marL="0" rtl="0" algn="r">
+              <a:spcBef>
+                <a:spcPts val="0"/>
+              </a:spcBef>
+              <a:spcAft>
+                <a:spcPts val="0"/>
+              </a:spcAft>
+              <a:buClr>
+                <a:srgbClr val="000000"/>
+              </a:buClr>
+              <a:buSzPts val="1000"/>
+              <a:buFont typeface="Arial"/>
+              <a:buNone/>
+            </a:pPr>
+            <a:fld id="{00000000-1234-1234-1234-123412341234}" type="slidenum">
+              <a:rPr lang="uk"/>
+              <a:t>‹#›</a:t>
+            </a:fld>
             <a:endParaRPr/>
           </a:p>
         </p:txBody>
@@ -15539,6 +15764,51 @@
           </a:p>
         </p:txBody>
       </p:sp>
+      <p:sp>
+        <p:nvSpPr>
+          <p:cNvPr id="136" name="Google Shape;136;p2"/>
+          <p:cNvSpPr txBox="1"/>
+          <p:nvPr>
+            <p:ph idx="12" type="sldNum"/>
+          </p:nvPr>
+        </p:nvSpPr>
+        <p:spPr>
+          <a:xfrm>
+            <a:off x="8390734" y="4543668"/>
+            <a:ext cx="548700" cy="393600"/>
+          </a:xfrm>
+          <a:prstGeom prst="rect">
+            <a:avLst/>
+          </a:prstGeom>
+        </p:spPr>
+        <p:txBody>
+          <a:bodyPr anchorCtr="0" anchor="ctr" bIns="91425" lIns="91425" spcFirstLastPara="1" rIns="91425" wrap="square" tIns="91425">
+            <a:normAutofit/>
+          </a:bodyPr>
+          <a:lstStyle/>
+          <a:p>
+            <a:pPr indent="0" lvl="0" marL="0" rtl="0" algn="r">
+              <a:spcBef>
+                <a:spcPts val="0"/>
+              </a:spcBef>
+              <a:spcAft>
+                <a:spcPts val="0"/>
+              </a:spcAft>
+              <a:buClr>
+                <a:srgbClr val="000000"/>
+              </a:buClr>
+              <a:buSzPts val="1000"/>
+              <a:buFont typeface="Arial"/>
+              <a:buNone/>
+            </a:pPr>
+            <a:fld id="{00000000-1234-1234-1234-123412341234}" type="slidenum">
+              <a:rPr lang="uk"/>
+              <a:t>‹#›</a:t>
+            </a:fld>
+            <a:endParaRPr/>
+          </a:p>
+        </p:txBody>
+      </p:sp>
     </p:spTree>
   </p:cSld>
   <p:clrMapOvr>
@@ -15552,7 +15822,7 @@
   <p:cSld>
     <p:spTree>
       <p:nvGrpSpPr>
-        <p:cNvPr id="139" name="Shape 139"/>
+        <p:cNvPr id="140" name="Shape 140"/>
         <p:cNvGrpSpPr/>
         <p:nvPr/>
       </p:nvGrpSpPr>
@@ -15566,7 +15836,7 @@
       </p:grpSpPr>
       <p:sp>
         <p:nvSpPr>
-          <p:cNvPr id="140" name="Google Shape;140;p3"/>
+          <p:cNvPr id="141" name="Google Shape;141;p3"/>
           <p:cNvSpPr txBox="1"/>
           <p:nvPr>
             <p:ph type="title"/>
@@ -15614,7 +15884,7 @@
       </p:sp>
       <p:sp>
         <p:nvSpPr>
-          <p:cNvPr id="141" name="Google Shape;141;p3"/>
+          <p:cNvPr id="142" name="Google Shape;142;p3"/>
           <p:cNvSpPr txBox="1"/>
           <p:nvPr/>
         </p:nvSpPr>
@@ -15680,7 +15950,7 @@
       </p:sp>
       <p:pic>
         <p:nvPicPr>
-          <p:cNvPr id="142" name="Google Shape;142;p3"/>
+          <p:cNvPr id="143" name="Google Shape;143;p3"/>
           <p:cNvPicPr preferRelativeResize="0"/>
           <p:nvPr/>
         </p:nvPicPr>
@@ -15705,6 +15975,51 @@
           </a:ln>
         </p:spPr>
       </p:pic>
+      <p:sp>
+        <p:nvSpPr>
+          <p:cNvPr id="144" name="Google Shape;144;p3"/>
+          <p:cNvSpPr txBox="1"/>
+          <p:nvPr>
+            <p:ph idx="12" type="sldNum"/>
+          </p:nvPr>
+        </p:nvSpPr>
+        <p:spPr>
+          <a:xfrm>
+            <a:off x="8390734" y="4543668"/>
+            <a:ext cx="548700" cy="393600"/>
+          </a:xfrm>
+          <a:prstGeom prst="rect">
+            <a:avLst/>
+          </a:prstGeom>
+        </p:spPr>
+        <p:txBody>
+          <a:bodyPr anchorCtr="0" anchor="ctr" bIns="91425" lIns="91425" spcFirstLastPara="1" rIns="91425" wrap="square" tIns="91425">
+            <a:normAutofit/>
+          </a:bodyPr>
+          <a:lstStyle/>
+          <a:p>
+            <a:pPr indent="0" lvl="0" marL="0" rtl="0" algn="r">
+              <a:spcBef>
+                <a:spcPts val="0"/>
+              </a:spcBef>
+              <a:spcAft>
+                <a:spcPts val="0"/>
+              </a:spcAft>
+              <a:buClr>
+                <a:srgbClr val="000000"/>
+              </a:buClr>
+              <a:buSzPts val="1000"/>
+              <a:buFont typeface="Arial"/>
+              <a:buNone/>
+            </a:pPr>
+            <a:fld id="{00000000-1234-1234-1234-123412341234}" type="slidenum">
+              <a:rPr lang="uk"/>
+              <a:t>‹#›</a:t>
+            </a:fld>
+            <a:endParaRPr/>
+          </a:p>
+        </p:txBody>
+      </p:sp>
     </p:spTree>
   </p:cSld>
   <p:clrMapOvr>
@@ -15718,7 +16033,7 @@
   <p:cSld>
     <p:spTree>
       <p:nvGrpSpPr>
-        <p:cNvPr id="146" name="Shape 146"/>
+        <p:cNvPr id="148" name="Shape 148"/>
         <p:cNvGrpSpPr/>
         <p:nvPr/>
       </p:nvGrpSpPr>
@@ -15732,7 +16047,7 @@
       </p:grpSpPr>
       <p:sp>
         <p:nvSpPr>
-          <p:cNvPr id="147" name="Google Shape;147;p4"/>
+          <p:cNvPr id="149" name="Google Shape;149;p4"/>
           <p:cNvSpPr txBox="1"/>
           <p:nvPr>
             <p:ph type="title"/>
@@ -15780,7 +16095,7 @@
       </p:sp>
       <p:sp>
         <p:nvSpPr>
-          <p:cNvPr id="148" name="Google Shape;148;p4"/>
+          <p:cNvPr id="150" name="Google Shape;150;p4"/>
           <p:cNvSpPr txBox="1"/>
           <p:nvPr/>
         </p:nvSpPr>
@@ -15915,6 +16230,51 @@
           </a:p>
         </p:txBody>
       </p:sp>
+      <p:sp>
+        <p:nvSpPr>
+          <p:cNvPr id="151" name="Google Shape;151;p4"/>
+          <p:cNvSpPr txBox="1"/>
+          <p:nvPr>
+            <p:ph idx="12" type="sldNum"/>
+          </p:nvPr>
+        </p:nvSpPr>
+        <p:spPr>
+          <a:xfrm>
+            <a:off x="8390734" y="4543668"/>
+            <a:ext cx="548700" cy="393600"/>
+          </a:xfrm>
+          <a:prstGeom prst="rect">
+            <a:avLst/>
+          </a:prstGeom>
+        </p:spPr>
+        <p:txBody>
+          <a:bodyPr anchorCtr="0" anchor="ctr" bIns="91425" lIns="91425" spcFirstLastPara="1" rIns="91425" wrap="square" tIns="91425">
+            <a:normAutofit/>
+          </a:bodyPr>
+          <a:lstStyle/>
+          <a:p>
+            <a:pPr indent="0" lvl="0" marL="0" rtl="0" algn="r">
+              <a:spcBef>
+                <a:spcPts val="0"/>
+              </a:spcBef>
+              <a:spcAft>
+                <a:spcPts val="0"/>
+              </a:spcAft>
+              <a:buClr>
+                <a:srgbClr val="000000"/>
+              </a:buClr>
+              <a:buSzPts val="1000"/>
+              <a:buFont typeface="Arial"/>
+              <a:buNone/>
+            </a:pPr>
+            <a:fld id="{00000000-1234-1234-1234-123412341234}" type="slidenum">
+              <a:rPr lang="uk"/>
+              <a:t>‹#›</a:t>
+            </a:fld>
+            <a:endParaRPr sz="1400"/>
+          </a:p>
+        </p:txBody>
+      </p:sp>
     </p:spTree>
   </p:cSld>
   <p:clrMapOvr>
@@ -15928,7 +16288,7 @@
   <p:cSld>
     <p:spTree>
       <p:nvGrpSpPr>
-        <p:cNvPr id="152" name="Shape 152"/>
+        <p:cNvPr id="155" name="Shape 155"/>
         <p:cNvGrpSpPr/>
         <p:nvPr/>
       </p:nvGrpSpPr>
@@ -15942,7 +16302,7 @@
       </p:grpSpPr>
       <p:sp>
         <p:nvSpPr>
-          <p:cNvPr id="153" name="Google Shape;153;p5"/>
+          <p:cNvPr id="156" name="Google Shape;156;p5"/>
           <p:cNvSpPr txBox="1"/>
           <p:nvPr>
             <p:ph type="title"/>
@@ -15990,7 +16350,7 @@
       </p:sp>
       <p:sp>
         <p:nvSpPr>
-          <p:cNvPr id="154" name="Google Shape;154;p5"/>
+          <p:cNvPr id="157" name="Google Shape;157;p5"/>
           <p:cNvSpPr txBox="1"/>
           <p:nvPr/>
         </p:nvSpPr>
@@ -16125,6 +16485,51 @@
           </a:p>
         </p:txBody>
       </p:sp>
+      <p:sp>
+        <p:nvSpPr>
+          <p:cNvPr id="158" name="Google Shape;158;p5"/>
+          <p:cNvSpPr txBox="1"/>
+          <p:nvPr>
+            <p:ph idx="12" type="sldNum"/>
+          </p:nvPr>
+        </p:nvSpPr>
+        <p:spPr>
+          <a:xfrm>
+            <a:off x="8390734" y="4543668"/>
+            <a:ext cx="548700" cy="393600"/>
+          </a:xfrm>
+          <a:prstGeom prst="rect">
+            <a:avLst/>
+          </a:prstGeom>
+        </p:spPr>
+        <p:txBody>
+          <a:bodyPr anchorCtr="0" anchor="ctr" bIns="91425" lIns="91425" spcFirstLastPara="1" rIns="91425" wrap="square" tIns="91425">
+            <a:normAutofit/>
+          </a:bodyPr>
+          <a:lstStyle/>
+          <a:p>
+            <a:pPr indent="0" lvl="0" marL="0" rtl="0" algn="r">
+              <a:spcBef>
+                <a:spcPts val="0"/>
+              </a:spcBef>
+              <a:spcAft>
+                <a:spcPts val="0"/>
+              </a:spcAft>
+              <a:buClr>
+                <a:srgbClr val="000000"/>
+              </a:buClr>
+              <a:buSzPts val="1000"/>
+              <a:buFont typeface="Arial"/>
+              <a:buNone/>
+            </a:pPr>
+            <a:fld id="{00000000-1234-1234-1234-123412341234}" type="slidenum">
+              <a:rPr lang="uk"/>
+              <a:t>‹#›</a:t>
+            </a:fld>
+            <a:endParaRPr/>
+          </a:p>
+        </p:txBody>
+      </p:sp>
     </p:spTree>
   </p:cSld>
   <p:clrMapOvr>
@@ -16138,7 +16543,7 @@
   <p:cSld>
     <p:spTree>
       <p:nvGrpSpPr>
-        <p:cNvPr id="158" name="Shape 158"/>
+        <p:cNvPr id="162" name="Shape 162"/>
         <p:cNvGrpSpPr/>
         <p:nvPr/>
       </p:nvGrpSpPr>
@@ -16152,7 +16557,7 @@
       </p:grpSpPr>
       <p:sp>
         <p:nvSpPr>
-          <p:cNvPr id="159" name="Google Shape;159;p6"/>
+          <p:cNvPr id="163" name="Google Shape;163;p6"/>
           <p:cNvSpPr txBox="1"/>
           <p:nvPr>
             <p:ph type="title"/>
@@ -16200,7 +16605,7 @@
       </p:sp>
       <p:sp>
         <p:nvSpPr>
-          <p:cNvPr id="160" name="Google Shape;160;p6"/>
+          <p:cNvPr id="164" name="Google Shape;164;p6"/>
           <p:cNvSpPr txBox="1"/>
           <p:nvPr/>
         </p:nvSpPr>
@@ -16335,6 +16740,51 @@
           </a:p>
         </p:txBody>
       </p:sp>
+      <p:sp>
+        <p:nvSpPr>
+          <p:cNvPr id="165" name="Google Shape;165;p6"/>
+          <p:cNvSpPr txBox="1"/>
+          <p:nvPr>
+            <p:ph idx="12" type="sldNum"/>
+          </p:nvPr>
+        </p:nvSpPr>
+        <p:spPr>
+          <a:xfrm>
+            <a:off x="8390734" y="4543668"/>
+            <a:ext cx="548700" cy="393600"/>
+          </a:xfrm>
+          <a:prstGeom prst="rect">
+            <a:avLst/>
+          </a:prstGeom>
+        </p:spPr>
+        <p:txBody>
+          <a:bodyPr anchorCtr="0" anchor="ctr" bIns="91425" lIns="91425" spcFirstLastPara="1" rIns="91425" wrap="square" tIns="91425">
+            <a:normAutofit/>
+          </a:bodyPr>
+          <a:lstStyle/>
+          <a:p>
+            <a:pPr indent="0" lvl="0" marL="0" rtl="0" algn="r">
+              <a:spcBef>
+                <a:spcPts val="0"/>
+              </a:spcBef>
+              <a:spcAft>
+                <a:spcPts val="0"/>
+              </a:spcAft>
+              <a:buClr>
+                <a:srgbClr val="000000"/>
+              </a:buClr>
+              <a:buSzPts val="1000"/>
+              <a:buFont typeface="Arial"/>
+              <a:buNone/>
+            </a:pPr>
+            <a:fld id="{00000000-1234-1234-1234-123412341234}" type="slidenum">
+              <a:rPr lang="uk"/>
+              <a:t>‹#›</a:t>
+            </a:fld>
+            <a:endParaRPr/>
+          </a:p>
+        </p:txBody>
+      </p:sp>
     </p:spTree>
   </p:cSld>
   <p:clrMapOvr>
@@ -16348,7 +16798,7 @@
   <p:cSld>
     <p:spTree>
       <p:nvGrpSpPr>
-        <p:cNvPr id="164" name="Shape 164"/>
+        <p:cNvPr id="169" name="Shape 169"/>
         <p:cNvGrpSpPr/>
         <p:nvPr/>
       </p:nvGrpSpPr>
@@ -16362,7 +16812,7 @@
       </p:grpSpPr>
       <p:sp>
         <p:nvSpPr>
-          <p:cNvPr id="165" name="Google Shape;165;p7"/>
+          <p:cNvPr id="170" name="Google Shape;170;p7"/>
           <p:cNvSpPr txBox="1"/>
           <p:nvPr>
             <p:ph type="title"/>
@@ -16410,7 +16860,7 @@
       </p:sp>
       <p:pic>
         <p:nvPicPr>
-          <p:cNvPr id="166" name="Google Shape;166;p7"/>
+          <p:cNvPr id="171" name="Google Shape;171;p7"/>
           <p:cNvPicPr preferRelativeResize="0"/>
           <p:nvPr/>
         </p:nvPicPr>
@@ -16443,7 +16893,7 @@
       </p:pic>
       <p:sp>
         <p:nvSpPr>
-          <p:cNvPr id="167" name="Google Shape;167;p7"/>
+          <p:cNvPr id="172" name="Google Shape;172;p7"/>
           <p:cNvSpPr txBox="1"/>
           <p:nvPr/>
         </p:nvSpPr>
@@ -16509,7 +16959,7 @@
       </p:sp>
       <p:pic>
         <p:nvPicPr>
-          <p:cNvPr id="168" name="Google Shape;168;p7"/>
+          <p:cNvPr id="173" name="Google Shape;173;p7"/>
           <p:cNvPicPr preferRelativeResize="0"/>
           <p:nvPr/>
         </p:nvPicPr>
@@ -16542,7 +16992,7 @@
       </p:pic>
       <p:sp>
         <p:nvSpPr>
-          <p:cNvPr id="169" name="Google Shape;169;p7"/>
+          <p:cNvPr id="174" name="Google Shape;174;p7"/>
           <p:cNvSpPr txBox="1"/>
           <p:nvPr/>
         </p:nvSpPr>
@@ -16608,7 +17058,7 @@
       </p:sp>
       <p:pic>
         <p:nvPicPr>
-          <p:cNvPr id="170" name="Google Shape;170;p7"/>
+          <p:cNvPr id="175" name="Google Shape;175;p7"/>
           <p:cNvPicPr preferRelativeResize="0"/>
           <p:nvPr/>
         </p:nvPicPr>
@@ -16641,7 +17091,7 @@
       </p:pic>
       <p:sp>
         <p:nvSpPr>
-          <p:cNvPr id="171" name="Google Shape;171;p7"/>
+          <p:cNvPr id="176" name="Google Shape;176;p7"/>
           <p:cNvSpPr txBox="1"/>
           <p:nvPr/>
         </p:nvSpPr>
@@ -16707,7 +17157,7 @@
       </p:sp>
       <p:pic>
         <p:nvPicPr>
-          <p:cNvPr id="172" name="Google Shape;172;p7"/>
+          <p:cNvPr id="177" name="Google Shape;177;p7"/>
           <p:cNvPicPr preferRelativeResize="0"/>
           <p:nvPr/>
         </p:nvPicPr>
@@ -16740,7 +17190,7 @@
       </p:pic>
       <p:sp>
         <p:nvSpPr>
-          <p:cNvPr id="173" name="Google Shape;173;p7"/>
+          <p:cNvPr id="178" name="Google Shape;178;p7"/>
           <p:cNvSpPr txBox="1"/>
           <p:nvPr/>
         </p:nvSpPr>
@@ -16806,7 +17256,7 @@
       </p:sp>
       <p:pic>
         <p:nvPicPr>
-          <p:cNvPr id="174" name="Google Shape;174;p7"/>
+          <p:cNvPr id="179" name="Google Shape;179;p7"/>
           <p:cNvPicPr preferRelativeResize="0"/>
           <p:nvPr/>
         </p:nvPicPr>
@@ -16839,7 +17289,7 @@
       </p:pic>
       <p:sp>
         <p:nvSpPr>
-          <p:cNvPr id="175" name="Google Shape;175;p7"/>
+          <p:cNvPr id="180" name="Google Shape;180;p7"/>
           <p:cNvSpPr txBox="1"/>
           <p:nvPr/>
         </p:nvSpPr>
@@ -16905,7 +17355,7 @@
       </p:sp>
       <p:pic>
         <p:nvPicPr>
-          <p:cNvPr id="176" name="Google Shape;176;p7"/>
+          <p:cNvPr id="181" name="Google Shape;181;p7"/>
           <p:cNvPicPr preferRelativeResize="0"/>
           <p:nvPr/>
         </p:nvPicPr>
@@ -16938,7 +17388,7 @@
       </p:pic>
       <p:sp>
         <p:nvSpPr>
-          <p:cNvPr id="177" name="Google Shape;177;p7"/>
+          <p:cNvPr id="182" name="Google Shape;182;p7"/>
           <p:cNvSpPr txBox="1"/>
           <p:nvPr/>
         </p:nvSpPr>
@@ -17033,6 +17483,51 @@
           </a:p>
         </p:txBody>
       </p:sp>
+      <p:sp>
+        <p:nvSpPr>
+          <p:cNvPr id="183" name="Google Shape;183;p7"/>
+          <p:cNvSpPr txBox="1"/>
+          <p:nvPr>
+            <p:ph idx="12" type="sldNum"/>
+          </p:nvPr>
+        </p:nvSpPr>
+        <p:spPr>
+          <a:xfrm>
+            <a:off x="8390734" y="4543668"/>
+            <a:ext cx="548700" cy="393600"/>
+          </a:xfrm>
+          <a:prstGeom prst="rect">
+            <a:avLst/>
+          </a:prstGeom>
+        </p:spPr>
+        <p:txBody>
+          <a:bodyPr anchorCtr="0" anchor="ctr" bIns="91425" lIns="91425" spcFirstLastPara="1" rIns="91425" wrap="square" tIns="91425">
+            <a:normAutofit/>
+          </a:bodyPr>
+          <a:lstStyle/>
+          <a:p>
+            <a:pPr indent="0" lvl="0" marL="0" rtl="0" algn="r">
+              <a:spcBef>
+                <a:spcPts val="0"/>
+              </a:spcBef>
+              <a:spcAft>
+                <a:spcPts val="0"/>
+              </a:spcAft>
+              <a:buClr>
+                <a:srgbClr val="000000"/>
+              </a:buClr>
+              <a:buSzPts val="1000"/>
+              <a:buFont typeface="Arial"/>
+              <a:buNone/>
+            </a:pPr>
+            <a:fld id="{00000000-1234-1234-1234-123412341234}" type="slidenum">
+              <a:rPr lang="uk"/>
+              <a:t>‹#›</a:t>
+            </a:fld>
+            <a:endParaRPr/>
+          </a:p>
+        </p:txBody>
+      </p:sp>
     </p:spTree>
   </p:cSld>
   <p:clrMapOvr>
@@ -17046,7 +17541,7 @@
   <p:cSld>
     <p:spTree>
       <p:nvGrpSpPr>
-        <p:cNvPr id="181" name="Shape 181"/>
+        <p:cNvPr id="187" name="Shape 187"/>
         <p:cNvGrpSpPr/>
         <p:nvPr/>
       </p:nvGrpSpPr>
@@ -17060,7 +17555,7 @@
       </p:grpSpPr>
       <p:sp>
         <p:nvSpPr>
-          <p:cNvPr id="182" name="Google Shape;182;p8"/>
+          <p:cNvPr id="188" name="Google Shape;188;p8"/>
           <p:cNvSpPr txBox="1"/>
           <p:nvPr>
             <p:ph type="title"/>
@@ -17108,7 +17603,7 @@
       </p:sp>
       <p:sp>
         <p:nvSpPr>
-          <p:cNvPr id="183" name="Google Shape;183;p8"/>
+          <p:cNvPr id="189" name="Google Shape;189;p8"/>
           <p:cNvSpPr txBox="1"/>
           <p:nvPr/>
         </p:nvSpPr>
@@ -17214,7 +17709,7 @@
       </p:sp>
       <p:pic>
         <p:nvPicPr>
-          <p:cNvPr id="184" name="Google Shape;184;p8"/>
+          <p:cNvPr id="190" name="Google Shape;190;p8"/>
           <p:cNvPicPr preferRelativeResize="0"/>
           <p:nvPr/>
         </p:nvPicPr>
@@ -17246,6 +17741,51 @@
           </a:ln>
         </p:spPr>
       </p:pic>
+      <p:sp>
+        <p:nvSpPr>
+          <p:cNvPr id="191" name="Google Shape;191;p8"/>
+          <p:cNvSpPr txBox="1"/>
+          <p:nvPr>
+            <p:ph idx="12" type="sldNum"/>
+          </p:nvPr>
+        </p:nvSpPr>
+        <p:spPr>
+          <a:xfrm>
+            <a:off x="8390734" y="4543668"/>
+            <a:ext cx="548700" cy="393600"/>
+          </a:xfrm>
+          <a:prstGeom prst="rect">
+            <a:avLst/>
+          </a:prstGeom>
+        </p:spPr>
+        <p:txBody>
+          <a:bodyPr anchorCtr="0" anchor="ctr" bIns="91425" lIns="91425" spcFirstLastPara="1" rIns="91425" wrap="square" tIns="91425">
+            <a:normAutofit/>
+          </a:bodyPr>
+          <a:lstStyle/>
+          <a:p>
+            <a:pPr indent="0" lvl="0" marL="0" rtl="0" algn="r">
+              <a:spcBef>
+                <a:spcPts val="0"/>
+              </a:spcBef>
+              <a:spcAft>
+                <a:spcPts val="0"/>
+              </a:spcAft>
+              <a:buClr>
+                <a:srgbClr val="000000"/>
+              </a:buClr>
+              <a:buSzPts val="1000"/>
+              <a:buFont typeface="Arial"/>
+              <a:buNone/>
+            </a:pPr>
+            <a:fld id="{00000000-1234-1234-1234-123412341234}" type="slidenum">
+              <a:rPr lang="uk"/>
+              <a:t>‹#›</a:t>
+            </a:fld>
+            <a:endParaRPr/>
+          </a:p>
+        </p:txBody>
+      </p:sp>
     </p:spTree>
   </p:cSld>
   <p:clrMapOvr>
@@ -17259,7 +17799,7 @@
   <p:cSld>
     <p:spTree>
       <p:nvGrpSpPr>
-        <p:cNvPr id="188" name="Shape 188"/>
+        <p:cNvPr id="195" name="Shape 195"/>
         <p:cNvGrpSpPr/>
         <p:nvPr/>
       </p:nvGrpSpPr>
@@ -17273,7 +17813,7 @@
       </p:grpSpPr>
       <p:sp>
         <p:nvSpPr>
-          <p:cNvPr id="189" name="Google Shape;189;p9"/>
+          <p:cNvPr id="196" name="Google Shape;196;p9"/>
           <p:cNvSpPr txBox="1"/>
           <p:nvPr>
             <p:ph type="title"/>
@@ -17321,7 +17861,7 @@
       </p:sp>
       <p:sp>
         <p:nvSpPr>
-          <p:cNvPr id="190" name="Google Shape;190;p9"/>
+          <p:cNvPr id="197" name="Google Shape;197;p9"/>
           <p:cNvSpPr txBox="1"/>
           <p:nvPr/>
         </p:nvSpPr>
@@ -17427,7 +17967,7 @@
       </p:sp>
       <p:pic>
         <p:nvPicPr>
-          <p:cNvPr id="191" name="Google Shape;191;p9"/>
+          <p:cNvPr id="198" name="Google Shape;198;p9"/>
           <p:cNvPicPr preferRelativeResize="0"/>
           <p:nvPr/>
         </p:nvPicPr>
@@ -17459,6 +17999,51 @@
           </a:ln>
         </p:spPr>
       </p:pic>
+      <p:sp>
+        <p:nvSpPr>
+          <p:cNvPr id="199" name="Google Shape;199;p9"/>
+          <p:cNvSpPr txBox="1"/>
+          <p:nvPr>
+            <p:ph idx="12" type="sldNum"/>
+          </p:nvPr>
+        </p:nvSpPr>
+        <p:spPr>
+          <a:xfrm>
+            <a:off x="8390734" y="4543668"/>
+            <a:ext cx="548700" cy="393600"/>
+          </a:xfrm>
+          <a:prstGeom prst="rect">
+            <a:avLst/>
+          </a:prstGeom>
+        </p:spPr>
+        <p:txBody>
+          <a:bodyPr anchorCtr="0" anchor="ctr" bIns="91425" lIns="91425" spcFirstLastPara="1" rIns="91425" wrap="square" tIns="91425">
+            <a:normAutofit/>
+          </a:bodyPr>
+          <a:lstStyle/>
+          <a:p>
+            <a:pPr indent="0" lvl="0" marL="0" rtl="0" algn="r">
+              <a:spcBef>
+                <a:spcPts val="0"/>
+              </a:spcBef>
+              <a:spcAft>
+                <a:spcPts val="0"/>
+              </a:spcAft>
+              <a:buClr>
+                <a:srgbClr val="000000"/>
+              </a:buClr>
+              <a:buSzPts val="1000"/>
+              <a:buFont typeface="Arial"/>
+              <a:buNone/>
+            </a:pPr>
+            <a:fld id="{00000000-1234-1234-1234-123412341234}" type="slidenum">
+              <a:rPr lang="uk"/>
+              <a:t>‹#›</a:t>
+            </a:fld>
+            <a:endParaRPr/>
+          </a:p>
+        </p:txBody>
+      </p:sp>
     </p:spTree>
   </p:cSld>
   <p:clrMapOvr>

--- a/2026_М_ПІ_ІПЗздм-24-1_Захаров_Ю_Ю.pptx
+++ b/2026_М_ПІ_ІПЗздм-24-1_Захаров_Ю_Ю.pptx
@@ -22,16 +22,17 @@
     <p:sldId id="267" r:id="rId17"/>
     <p:sldId id="268" r:id="rId18"/>
     <p:sldId id="269" r:id="rId19"/>
+    <p:sldId id="270" r:id="rId20"/>
   </p:sldIdLst>
   <p:sldSz cy="5143500" cx="9144000"/>
   <p:notesSz cx="6858000" cy="9144000"/>
   <p:embeddedFontLst>
     <p:embeddedFont>
       <p:font typeface="Nunito"/>
-      <p:regular r:id="rId20"/>
-      <p:bold r:id="rId21"/>
-      <p:italic r:id="rId22"/>
-      <p:boldItalic r:id="rId23"/>
+      <p:regular r:id="rId21"/>
+      <p:bold r:id="rId22"/>
+      <p:italic r:id="rId23"/>
+      <p:boldItalic r:id="rId24"/>
     </p:embeddedFont>
   </p:embeddedFontLst>
   <p:defaultTextStyle>
@@ -279,7 +280,7 @@
       </p15:sldGuideLst>
     </p:ext>
     <p:ext uri="GoogleSlidesCustomDataVersion2">
-      <go:slidesCustomData xmlns:go="http://customooxmlschemas.google.com/" r:id="rId24" roundtripDataSignature="AMtx7mh02aR7HISUhObRe5bcq5KdbCvReA=="/>
+      <go:slidesCustomData xmlns:go="http://customooxmlschemas.google.com/" r:id="rId25" roundtripDataSignature="AMtx7mjQHOP4gyhdkYH1TwAelPTbnIwQqQ=="/>
     </p:ext>
   </p:extLst>
 </p:presentation>
@@ -968,7 +969,7 @@
   <p:cSld>
     <p:spTree>
       <p:nvGrpSpPr>
-        <p:cNvPr id="200" name="Shape 200"/>
+        <p:cNvPr id="201" name="Shape 201"/>
         <p:cNvGrpSpPr/>
         <p:nvPr/>
       </p:nvGrpSpPr>
@@ -982,7 +983,7 @@
       </p:grpSpPr>
       <p:sp>
         <p:nvSpPr>
-          <p:cNvPr id="201" name="Google Shape;201;p10:notes"/>
+          <p:cNvPr id="202" name="Google Shape;202;p10:notes"/>
           <p:cNvSpPr/>
           <p:nvPr>
             <p:ph idx="2" type="sldImg"/>
@@ -1027,7 +1028,7 @@
       </p:sp>
       <p:sp>
         <p:nvSpPr>
-          <p:cNvPr id="202" name="Google Shape;202;p10:notes"/>
+          <p:cNvPr id="203" name="Google Shape;203;p10:notes"/>
           <p:cNvSpPr txBox="1"/>
           <p:nvPr>
             <p:ph idx="1" type="body"/>
@@ -1085,7 +1086,7 @@
   <p:cSld>
     <p:spTree>
       <p:nvGrpSpPr>
-        <p:cNvPr id="208" name="Shape 208"/>
+        <p:cNvPr id="209" name="Shape 209"/>
         <p:cNvGrpSpPr/>
         <p:nvPr/>
       </p:nvGrpSpPr>
@@ -1099,205 +1100,7 @@
       </p:grpSpPr>
       <p:sp>
         <p:nvSpPr>
-          <p:cNvPr id="209" name="Google Shape;209;g3d08dcc0f4b_0_0:notes"/>
-          <p:cNvSpPr/>
-          <p:nvPr>
-            <p:ph idx="2" type="sldImg"/>
-          </p:nvPr>
-        </p:nvSpPr>
-        <p:spPr>
-          <a:xfrm>
-            <a:off x="381300" y="685800"/>
-            <a:ext cx="6096000" cy="3429000"/>
-          </a:xfrm>
-          <a:custGeom>
-            <a:rect b="b" l="l" r="r" t="t"/>
-            <a:pathLst>
-              <a:path extrusionOk="0" h="120000" w="120000">
-                <a:moveTo>
-                  <a:pt x="0" y="0"/>
-                </a:moveTo>
-                <a:lnTo>
-                  <a:pt x="120000" y="0"/>
-                </a:lnTo>
-                <a:lnTo>
-                  <a:pt x="120000" y="120000"/>
-                </a:lnTo>
-                <a:lnTo>
-                  <a:pt x="0" y="120000"/>
-                </a:lnTo>
-                <a:close/>
-              </a:path>
-            </a:pathLst>
-          </a:custGeom>
-        </p:spPr>
-      </p:sp>
-      <p:sp>
-        <p:nvSpPr>
-          <p:cNvPr id="210" name="Google Shape;210;g3d08dcc0f4b_0_0:notes"/>
-          <p:cNvSpPr txBox="1"/>
-          <p:nvPr>
-            <p:ph idx="1" type="body"/>
-          </p:nvPr>
-        </p:nvSpPr>
-        <p:spPr>
-          <a:xfrm>
-            <a:off x="685800" y="4343400"/>
-            <a:ext cx="5486400" cy="4114800"/>
-          </a:xfrm>
-          <a:prstGeom prst="rect">
-            <a:avLst/>
-          </a:prstGeom>
-        </p:spPr>
-        <p:txBody>
-          <a:bodyPr anchorCtr="0" anchor="t" bIns="91425" lIns="91425" spcFirstLastPara="1" rIns="91425" wrap="square" tIns="91425">
-            <a:noAutofit/>
-          </a:bodyPr>
-          <a:lstStyle/>
-          <a:p>
-            <a:pPr indent="0" lvl="0" marL="0" rtl="0" algn="l">
-              <a:spcBef>
-                <a:spcPts val="0"/>
-              </a:spcBef>
-              <a:spcAft>
-                <a:spcPts val="0"/>
-              </a:spcAft>
-              <a:buNone/>
-            </a:pPr>
-            <a:r>
-              <a:t/>
-            </a:r>
-            <a:endParaRPr/>
-          </a:p>
-        </p:txBody>
-      </p:sp>
-    </p:spTree>
-  </p:cSld>
-  <p:clrMapOvr>
-    <a:masterClrMapping/>
-  </p:clrMapOvr>
-</p:notes>
-</file>
-
-<file path=ppt/notesSlides/notesSlide12.xml><?xml version="1.0" encoding="utf-8"?>
-<p:notes xmlns:a="http://schemas.openxmlformats.org/drawingml/2006/main" xmlns:r="http://schemas.openxmlformats.org/officeDocument/2006/relationships" xmlns:mc="http://schemas.openxmlformats.org/markup-compatibility/2006" xmlns:mv="urn:schemas-microsoft-com:mac:vml" xmlns:p="http://schemas.openxmlformats.org/presentationml/2006/main" xmlns:c="http://schemas.openxmlformats.org/drawingml/2006/chart" xmlns:dgm="http://schemas.openxmlformats.org/drawingml/2006/diagram" xmlns:o="urn:schemas-microsoft-com:office:office" xmlns:v="urn:schemas-microsoft-com:vml" xmlns:pvml="urn:schemas-microsoft-com:office:powerpoint" xmlns:com="http://schemas.openxmlformats.org/drawingml/2006/compatibility" xmlns:p14="http://schemas.microsoft.com/office/powerpoint/2010/main" xmlns:p15="http://schemas.microsoft.com/office/powerpoint/2012/main" xmlns:ahyp="http://schemas.microsoft.com/office/drawing/2018/hyperlinkcolor" showMasterPhAnim="0" showMasterSp="0">
-  <p:cSld>
-    <p:spTree>
-      <p:nvGrpSpPr>
-        <p:cNvPr id="216" name="Shape 216"/>
-        <p:cNvGrpSpPr/>
-        <p:nvPr/>
-      </p:nvGrpSpPr>
-      <p:grpSpPr>
-        <a:xfrm>
-          <a:off x="0" y="0"/>
-          <a:ext cx="0" cy="0"/>
-          <a:chOff x="0" y="0"/>
-          <a:chExt cx="0" cy="0"/>
-        </a:xfrm>
-      </p:grpSpPr>
-      <p:sp>
-        <p:nvSpPr>
-          <p:cNvPr id="217" name="Google Shape;217;g3d08dcc0f4b_0_8:notes"/>
-          <p:cNvSpPr/>
-          <p:nvPr>
-            <p:ph idx="2" type="sldImg"/>
-          </p:nvPr>
-        </p:nvSpPr>
-        <p:spPr>
-          <a:xfrm>
-            <a:off x="381300" y="685800"/>
-            <a:ext cx="6096000" cy="3429000"/>
-          </a:xfrm>
-          <a:custGeom>
-            <a:rect b="b" l="l" r="r" t="t"/>
-            <a:pathLst>
-              <a:path extrusionOk="0" h="120000" w="120000">
-                <a:moveTo>
-                  <a:pt x="0" y="0"/>
-                </a:moveTo>
-                <a:lnTo>
-                  <a:pt x="120000" y="0"/>
-                </a:lnTo>
-                <a:lnTo>
-                  <a:pt x="120000" y="120000"/>
-                </a:lnTo>
-                <a:lnTo>
-                  <a:pt x="0" y="120000"/>
-                </a:lnTo>
-                <a:close/>
-              </a:path>
-            </a:pathLst>
-          </a:custGeom>
-        </p:spPr>
-      </p:sp>
-      <p:sp>
-        <p:nvSpPr>
-          <p:cNvPr id="218" name="Google Shape;218;g3d08dcc0f4b_0_8:notes"/>
-          <p:cNvSpPr txBox="1"/>
-          <p:nvPr>
-            <p:ph idx="1" type="body"/>
-          </p:nvPr>
-        </p:nvSpPr>
-        <p:spPr>
-          <a:xfrm>
-            <a:off x="685800" y="4343400"/>
-            <a:ext cx="5486400" cy="4114800"/>
-          </a:xfrm>
-          <a:prstGeom prst="rect">
-            <a:avLst/>
-          </a:prstGeom>
-        </p:spPr>
-        <p:txBody>
-          <a:bodyPr anchorCtr="0" anchor="t" bIns="91425" lIns="91425" spcFirstLastPara="1" rIns="91425" wrap="square" tIns="91425">
-            <a:noAutofit/>
-          </a:bodyPr>
-          <a:lstStyle/>
-          <a:p>
-            <a:pPr indent="0" lvl="0" marL="0" rtl="0" algn="l">
-              <a:spcBef>
-                <a:spcPts val="0"/>
-              </a:spcBef>
-              <a:spcAft>
-                <a:spcPts val="0"/>
-              </a:spcAft>
-              <a:buNone/>
-            </a:pPr>
-            <a:r>
-              <a:t/>
-            </a:r>
-            <a:endParaRPr/>
-          </a:p>
-        </p:txBody>
-      </p:sp>
-    </p:spTree>
-  </p:cSld>
-  <p:clrMapOvr>
-    <a:masterClrMapping/>
-  </p:clrMapOvr>
-</p:notes>
-</file>
-
-<file path=ppt/notesSlides/notesSlide13.xml><?xml version="1.0" encoding="utf-8"?>
-<p:notes xmlns:a="http://schemas.openxmlformats.org/drawingml/2006/main" xmlns:r="http://schemas.openxmlformats.org/officeDocument/2006/relationships" xmlns:mc="http://schemas.openxmlformats.org/markup-compatibility/2006" xmlns:mv="urn:schemas-microsoft-com:mac:vml" xmlns:p="http://schemas.openxmlformats.org/presentationml/2006/main" xmlns:c="http://schemas.openxmlformats.org/drawingml/2006/chart" xmlns:dgm="http://schemas.openxmlformats.org/drawingml/2006/diagram" xmlns:o="urn:schemas-microsoft-com:office:office" xmlns:v="urn:schemas-microsoft-com:vml" xmlns:pvml="urn:schemas-microsoft-com:office:powerpoint" xmlns:com="http://schemas.openxmlformats.org/drawingml/2006/compatibility" xmlns:p14="http://schemas.microsoft.com/office/powerpoint/2010/main" xmlns:p15="http://schemas.microsoft.com/office/powerpoint/2012/main" xmlns:ahyp="http://schemas.microsoft.com/office/drawing/2018/hyperlinkcolor" showMasterPhAnim="0" showMasterSp="0">
-  <p:cSld>
-    <p:spTree>
-      <p:nvGrpSpPr>
-        <p:cNvPr id="224" name="Shape 224"/>
-        <p:cNvGrpSpPr/>
-        <p:nvPr/>
-      </p:nvGrpSpPr>
-      <p:grpSpPr>
-        <a:xfrm>
-          <a:off x="0" y="0"/>
-          <a:ext cx="0" cy="0"/>
-          <a:chOff x="0" y="0"/>
-          <a:chExt cx="0" cy="0"/>
-        </a:xfrm>
-      </p:grpSpPr>
-      <p:sp>
-        <p:nvSpPr>
-          <p:cNvPr id="225" name="Google Shape;225;p11:notes"/>
+          <p:cNvPr id="210" name="Google Shape;210;g3e178865fe7_0_6:notes"/>
           <p:cNvSpPr/>
           <p:nvPr>
             <p:ph idx="2" type="sldImg"/>
@@ -1342,7 +1145,7 @@
       </p:sp>
       <p:sp>
         <p:nvSpPr>
-          <p:cNvPr id="226" name="Google Shape;226;p11:notes"/>
+          <p:cNvPr id="211" name="Google Shape;211;g3e178865fe7_0_6:notes"/>
           <p:cNvSpPr txBox="1"/>
           <p:nvPr>
             <p:ph idx="1" type="body"/>
@@ -1395,12 +1198,12 @@
 </p:notes>
 </file>
 
-<file path=ppt/notesSlides/notesSlide14.xml><?xml version="1.0" encoding="utf-8"?>
+<file path=ppt/notesSlides/notesSlide12.xml><?xml version="1.0" encoding="utf-8"?>
 <p:notes xmlns:a="http://schemas.openxmlformats.org/drawingml/2006/main" xmlns:r="http://schemas.openxmlformats.org/officeDocument/2006/relationships" xmlns:mc="http://schemas.openxmlformats.org/markup-compatibility/2006" xmlns:mv="urn:schemas-microsoft-com:mac:vml" xmlns:p="http://schemas.openxmlformats.org/presentationml/2006/main" xmlns:c="http://schemas.openxmlformats.org/drawingml/2006/chart" xmlns:dgm="http://schemas.openxmlformats.org/drawingml/2006/diagram" xmlns:o="urn:schemas-microsoft-com:office:office" xmlns:v="urn:schemas-microsoft-com:vml" xmlns:pvml="urn:schemas-microsoft-com:office:powerpoint" xmlns:com="http://schemas.openxmlformats.org/drawingml/2006/compatibility" xmlns:p14="http://schemas.microsoft.com/office/powerpoint/2010/main" xmlns:p15="http://schemas.microsoft.com/office/powerpoint/2012/main" xmlns:ahyp="http://schemas.microsoft.com/office/drawing/2018/hyperlinkcolor" showMasterPhAnim="0" showMasterSp="0">
   <p:cSld>
     <p:spTree>
       <p:nvGrpSpPr>
-        <p:cNvPr id="231" name="Shape 231"/>
+        <p:cNvPr id="218" name="Shape 218"/>
         <p:cNvGrpSpPr/>
         <p:nvPr/>
       </p:nvGrpSpPr>
@@ -1414,7 +1217,205 @@
       </p:grpSpPr>
       <p:sp>
         <p:nvSpPr>
-          <p:cNvPr id="232" name="Google Shape;232;p12:notes"/>
+          <p:cNvPr id="219" name="Google Shape;219;g3d08dcc0f4b_0_0:notes"/>
+          <p:cNvSpPr/>
+          <p:nvPr>
+            <p:ph idx="2" type="sldImg"/>
+          </p:nvPr>
+        </p:nvSpPr>
+        <p:spPr>
+          <a:xfrm>
+            <a:off x="381300" y="685800"/>
+            <a:ext cx="6096000" cy="3429000"/>
+          </a:xfrm>
+          <a:custGeom>
+            <a:rect b="b" l="l" r="r" t="t"/>
+            <a:pathLst>
+              <a:path extrusionOk="0" h="120000" w="120000">
+                <a:moveTo>
+                  <a:pt x="0" y="0"/>
+                </a:moveTo>
+                <a:lnTo>
+                  <a:pt x="120000" y="0"/>
+                </a:lnTo>
+                <a:lnTo>
+                  <a:pt x="120000" y="120000"/>
+                </a:lnTo>
+                <a:lnTo>
+                  <a:pt x="0" y="120000"/>
+                </a:lnTo>
+                <a:close/>
+              </a:path>
+            </a:pathLst>
+          </a:custGeom>
+        </p:spPr>
+      </p:sp>
+      <p:sp>
+        <p:nvSpPr>
+          <p:cNvPr id="220" name="Google Shape;220;g3d08dcc0f4b_0_0:notes"/>
+          <p:cNvSpPr txBox="1"/>
+          <p:nvPr>
+            <p:ph idx="1" type="body"/>
+          </p:nvPr>
+        </p:nvSpPr>
+        <p:spPr>
+          <a:xfrm>
+            <a:off x="685800" y="4343400"/>
+            <a:ext cx="5486400" cy="4114800"/>
+          </a:xfrm>
+          <a:prstGeom prst="rect">
+            <a:avLst/>
+          </a:prstGeom>
+        </p:spPr>
+        <p:txBody>
+          <a:bodyPr anchorCtr="0" anchor="t" bIns="91425" lIns="91425" spcFirstLastPara="1" rIns="91425" wrap="square" tIns="91425">
+            <a:noAutofit/>
+          </a:bodyPr>
+          <a:lstStyle/>
+          <a:p>
+            <a:pPr indent="0" lvl="0" marL="0" rtl="0" algn="l">
+              <a:spcBef>
+                <a:spcPts val="0"/>
+              </a:spcBef>
+              <a:spcAft>
+                <a:spcPts val="0"/>
+              </a:spcAft>
+              <a:buNone/>
+            </a:pPr>
+            <a:r>
+              <a:t/>
+            </a:r>
+            <a:endParaRPr/>
+          </a:p>
+        </p:txBody>
+      </p:sp>
+    </p:spTree>
+  </p:cSld>
+  <p:clrMapOvr>
+    <a:masterClrMapping/>
+  </p:clrMapOvr>
+</p:notes>
+</file>
+
+<file path=ppt/notesSlides/notesSlide13.xml><?xml version="1.0" encoding="utf-8"?>
+<p:notes xmlns:a="http://schemas.openxmlformats.org/drawingml/2006/main" xmlns:r="http://schemas.openxmlformats.org/officeDocument/2006/relationships" xmlns:mc="http://schemas.openxmlformats.org/markup-compatibility/2006" xmlns:mv="urn:schemas-microsoft-com:mac:vml" xmlns:p="http://schemas.openxmlformats.org/presentationml/2006/main" xmlns:c="http://schemas.openxmlformats.org/drawingml/2006/chart" xmlns:dgm="http://schemas.openxmlformats.org/drawingml/2006/diagram" xmlns:o="urn:schemas-microsoft-com:office:office" xmlns:v="urn:schemas-microsoft-com:vml" xmlns:pvml="urn:schemas-microsoft-com:office:powerpoint" xmlns:com="http://schemas.openxmlformats.org/drawingml/2006/compatibility" xmlns:p14="http://schemas.microsoft.com/office/powerpoint/2010/main" xmlns:p15="http://schemas.microsoft.com/office/powerpoint/2012/main" xmlns:ahyp="http://schemas.microsoft.com/office/drawing/2018/hyperlinkcolor" showMasterPhAnim="0" showMasterSp="0">
+  <p:cSld>
+    <p:spTree>
+      <p:nvGrpSpPr>
+        <p:cNvPr id="226" name="Shape 226"/>
+        <p:cNvGrpSpPr/>
+        <p:nvPr/>
+      </p:nvGrpSpPr>
+      <p:grpSpPr>
+        <a:xfrm>
+          <a:off x="0" y="0"/>
+          <a:ext cx="0" cy="0"/>
+          <a:chOff x="0" y="0"/>
+          <a:chExt cx="0" cy="0"/>
+        </a:xfrm>
+      </p:grpSpPr>
+      <p:sp>
+        <p:nvSpPr>
+          <p:cNvPr id="227" name="Google Shape;227;g3d08dcc0f4b_0_8:notes"/>
+          <p:cNvSpPr/>
+          <p:nvPr>
+            <p:ph idx="2" type="sldImg"/>
+          </p:nvPr>
+        </p:nvSpPr>
+        <p:spPr>
+          <a:xfrm>
+            <a:off x="381300" y="685800"/>
+            <a:ext cx="6096000" cy="3429000"/>
+          </a:xfrm>
+          <a:custGeom>
+            <a:rect b="b" l="l" r="r" t="t"/>
+            <a:pathLst>
+              <a:path extrusionOk="0" h="120000" w="120000">
+                <a:moveTo>
+                  <a:pt x="0" y="0"/>
+                </a:moveTo>
+                <a:lnTo>
+                  <a:pt x="120000" y="0"/>
+                </a:lnTo>
+                <a:lnTo>
+                  <a:pt x="120000" y="120000"/>
+                </a:lnTo>
+                <a:lnTo>
+                  <a:pt x="0" y="120000"/>
+                </a:lnTo>
+                <a:close/>
+              </a:path>
+            </a:pathLst>
+          </a:custGeom>
+        </p:spPr>
+      </p:sp>
+      <p:sp>
+        <p:nvSpPr>
+          <p:cNvPr id="228" name="Google Shape;228;g3d08dcc0f4b_0_8:notes"/>
+          <p:cNvSpPr txBox="1"/>
+          <p:nvPr>
+            <p:ph idx="1" type="body"/>
+          </p:nvPr>
+        </p:nvSpPr>
+        <p:spPr>
+          <a:xfrm>
+            <a:off x="685800" y="4343400"/>
+            <a:ext cx="5486400" cy="4114800"/>
+          </a:xfrm>
+          <a:prstGeom prst="rect">
+            <a:avLst/>
+          </a:prstGeom>
+        </p:spPr>
+        <p:txBody>
+          <a:bodyPr anchorCtr="0" anchor="t" bIns="91425" lIns="91425" spcFirstLastPara="1" rIns="91425" wrap="square" tIns="91425">
+            <a:noAutofit/>
+          </a:bodyPr>
+          <a:lstStyle/>
+          <a:p>
+            <a:pPr indent="0" lvl="0" marL="0" rtl="0" algn="l">
+              <a:spcBef>
+                <a:spcPts val="0"/>
+              </a:spcBef>
+              <a:spcAft>
+                <a:spcPts val="0"/>
+              </a:spcAft>
+              <a:buNone/>
+            </a:pPr>
+            <a:r>
+              <a:t/>
+            </a:r>
+            <a:endParaRPr/>
+          </a:p>
+        </p:txBody>
+      </p:sp>
+    </p:spTree>
+  </p:cSld>
+  <p:clrMapOvr>
+    <a:masterClrMapping/>
+  </p:clrMapOvr>
+</p:notes>
+</file>
+
+<file path=ppt/notesSlides/notesSlide14.xml><?xml version="1.0" encoding="utf-8"?>
+<p:notes xmlns:a="http://schemas.openxmlformats.org/drawingml/2006/main" xmlns:r="http://schemas.openxmlformats.org/officeDocument/2006/relationships" xmlns:mc="http://schemas.openxmlformats.org/markup-compatibility/2006" xmlns:mv="urn:schemas-microsoft-com:mac:vml" xmlns:p="http://schemas.openxmlformats.org/presentationml/2006/main" xmlns:c="http://schemas.openxmlformats.org/drawingml/2006/chart" xmlns:dgm="http://schemas.openxmlformats.org/drawingml/2006/diagram" xmlns:o="urn:schemas-microsoft-com:office:office" xmlns:v="urn:schemas-microsoft-com:vml" xmlns:pvml="urn:schemas-microsoft-com:office:powerpoint" xmlns:com="http://schemas.openxmlformats.org/drawingml/2006/compatibility" xmlns:p14="http://schemas.microsoft.com/office/powerpoint/2010/main" xmlns:p15="http://schemas.microsoft.com/office/powerpoint/2012/main" xmlns:ahyp="http://schemas.microsoft.com/office/drawing/2018/hyperlinkcolor" showMasterPhAnim="0" showMasterSp="0">
+  <p:cSld>
+    <p:spTree>
+      <p:nvGrpSpPr>
+        <p:cNvPr id="234" name="Shape 234"/>
+        <p:cNvGrpSpPr/>
+        <p:nvPr/>
+      </p:nvGrpSpPr>
+      <p:grpSpPr>
+        <a:xfrm>
+          <a:off x="0" y="0"/>
+          <a:ext cx="0" cy="0"/>
+          <a:chOff x="0" y="0"/>
+          <a:chExt cx="0" cy="0"/>
+        </a:xfrm>
+      </p:grpSpPr>
+      <p:sp>
+        <p:nvSpPr>
+          <p:cNvPr id="235" name="Google Shape;235;p11:notes"/>
           <p:cNvSpPr/>
           <p:nvPr>
             <p:ph idx="2" type="sldImg"/>
@@ -1459,7 +1460,124 @@
       </p:sp>
       <p:sp>
         <p:nvSpPr>
-          <p:cNvPr id="233" name="Google Shape;233;p12:notes"/>
+          <p:cNvPr id="236" name="Google Shape;236;p11:notes"/>
+          <p:cNvSpPr txBox="1"/>
+          <p:nvPr>
+            <p:ph idx="1" type="body"/>
+          </p:nvPr>
+        </p:nvSpPr>
+        <p:spPr>
+          <a:xfrm>
+            <a:off x="685800" y="4343400"/>
+            <a:ext cx="5486400" cy="4114800"/>
+          </a:xfrm>
+          <a:prstGeom prst="rect">
+            <a:avLst/>
+          </a:prstGeom>
+          <a:noFill/>
+          <a:ln>
+            <a:noFill/>
+          </a:ln>
+        </p:spPr>
+        <p:txBody>
+          <a:bodyPr anchorCtr="0" anchor="t" bIns="91425" lIns="91425" spcFirstLastPara="1" rIns="91425" wrap="square" tIns="91425">
+            <a:noAutofit/>
+          </a:bodyPr>
+          <a:lstStyle/>
+          <a:p>
+            <a:pPr indent="0" lvl="0" marL="0" rtl="0" algn="l">
+              <a:lnSpc>
+                <a:spcPct val="100000"/>
+              </a:lnSpc>
+              <a:spcBef>
+                <a:spcPts val="0"/>
+              </a:spcBef>
+              <a:spcAft>
+                <a:spcPts val="0"/>
+              </a:spcAft>
+              <a:buSzPts val="1100"/>
+              <a:buNone/>
+            </a:pPr>
+            <a:r>
+              <a:t/>
+            </a:r>
+            <a:endParaRPr/>
+          </a:p>
+        </p:txBody>
+      </p:sp>
+    </p:spTree>
+  </p:cSld>
+  <p:clrMapOvr>
+    <a:masterClrMapping/>
+  </p:clrMapOvr>
+</p:notes>
+</file>
+
+<file path=ppt/notesSlides/notesSlide15.xml><?xml version="1.0" encoding="utf-8"?>
+<p:notes xmlns:a="http://schemas.openxmlformats.org/drawingml/2006/main" xmlns:r="http://schemas.openxmlformats.org/officeDocument/2006/relationships" xmlns:mc="http://schemas.openxmlformats.org/markup-compatibility/2006" xmlns:mv="urn:schemas-microsoft-com:mac:vml" xmlns:p="http://schemas.openxmlformats.org/presentationml/2006/main" xmlns:c="http://schemas.openxmlformats.org/drawingml/2006/chart" xmlns:dgm="http://schemas.openxmlformats.org/drawingml/2006/diagram" xmlns:o="urn:schemas-microsoft-com:office:office" xmlns:v="urn:schemas-microsoft-com:vml" xmlns:pvml="urn:schemas-microsoft-com:office:powerpoint" xmlns:com="http://schemas.openxmlformats.org/drawingml/2006/compatibility" xmlns:p14="http://schemas.microsoft.com/office/powerpoint/2010/main" xmlns:p15="http://schemas.microsoft.com/office/powerpoint/2012/main" xmlns:ahyp="http://schemas.microsoft.com/office/drawing/2018/hyperlinkcolor" showMasterPhAnim="0" showMasterSp="0">
+  <p:cSld>
+    <p:spTree>
+      <p:nvGrpSpPr>
+        <p:cNvPr id="241" name="Shape 241"/>
+        <p:cNvGrpSpPr/>
+        <p:nvPr/>
+      </p:nvGrpSpPr>
+      <p:grpSpPr>
+        <a:xfrm>
+          <a:off x="0" y="0"/>
+          <a:ext cx="0" cy="0"/>
+          <a:chOff x="0" y="0"/>
+          <a:chExt cx="0" cy="0"/>
+        </a:xfrm>
+      </p:grpSpPr>
+      <p:sp>
+        <p:nvSpPr>
+          <p:cNvPr id="242" name="Google Shape;242;p12:notes"/>
+          <p:cNvSpPr/>
+          <p:nvPr>
+            <p:ph idx="2" type="sldImg"/>
+          </p:nvPr>
+        </p:nvSpPr>
+        <p:spPr>
+          <a:xfrm>
+            <a:off x="381300" y="685800"/>
+            <a:ext cx="6096000" cy="3429000"/>
+          </a:xfrm>
+          <a:custGeom>
+            <a:rect b="b" l="l" r="r" t="t"/>
+            <a:pathLst>
+              <a:path extrusionOk="0" h="120000" w="120000">
+                <a:moveTo>
+                  <a:pt x="0" y="0"/>
+                </a:moveTo>
+                <a:lnTo>
+                  <a:pt x="120000" y="0"/>
+                </a:lnTo>
+                <a:lnTo>
+                  <a:pt x="120000" y="120000"/>
+                </a:lnTo>
+                <a:lnTo>
+                  <a:pt x="0" y="120000"/>
+                </a:lnTo>
+                <a:close/>
+              </a:path>
+            </a:pathLst>
+          </a:custGeom>
+          <a:noFill/>
+          <a:ln cap="flat" cmpd="sng" w="9525">
+            <a:solidFill>
+              <a:srgbClr val="000000"/>
+            </a:solidFill>
+            <a:prstDash val="solid"/>
+            <a:round/>
+            <a:headEnd len="sm" w="sm" type="none"/>
+            <a:tailEnd len="sm" w="sm" type="none"/>
+          </a:ln>
+        </p:spPr>
+      </p:sp>
+      <p:sp>
+        <p:nvSpPr>
+          <p:cNvPr id="243" name="Google Shape;243;p12:notes"/>
           <p:cNvSpPr txBox="1"/>
           <p:nvPr>
             <p:ph idx="1" type="body"/>
@@ -2336,7 +2454,7 @@
   <p:cSld>
     <p:spTree>
       <p:nvGrpSpPr>
-        <p:cNvPr id="192" name="Shape 192"/>
+        <p:cNvPr id="193" name="Shape 193"/>
         <p:cNvGrpSpPr/>
         <p:nvPr/>
       </p:nvGrpSpPr>
@@ -2350,7 +2468,7 @@
       </p:grpSpPr>
       <p:sp>
         <p:nvSpPr>
-          <p:cNvPr id="193" name="Google Shape;193;p9:notes"/>
+          <p:cNvPr id="194" name="Google Shape;194;p9:notes"/>
           <p:cNvSpPr/>
           <p:nvPr>
             <p:ph idx="2" type="sldImg"/>
@@ -2395,7 +2513,7 @@
       </p:sp>
       <p:sp>
         <p:nvSpPr>
-          <p:cNvPr id="194" name="Google Shape;194;p9:notes"/>
+          <p:cNvPr id="195" name="Google Shape;195;p9:notes"/>
           <p:cNvSpPr txBox="1"/>
           <p:nvPr>
             <p:ph idx="1" type="body"/>
@@ -14669,7 +14787,7 @@
   <p:cSld>
     <p:spTree>
       <p:nvGrpSpPr>
-        <p:cNvPr id="203" name="Shape 203"/>
+        <p:cNvPr id="204" name="Shape 204"/>
         <p:cNvGrpSpPr/>
         <p:nvPr/>
       </p:nvGrpSpPr>
@@ -14683,7 +14801,7 @@
       </p:grpSpPr>
       <p:sp>
         <p:nvSpPr>
-          <p:cNvPr id="204" name="Google Shape;204;p10"/>
+          <p:cNvPr id="205" name="Google Shape;205;p10"/>
           <p:cNvSpPr txBox="1"/>
           <p:nvPr>
             <p:ph type="title"/>
@@ -14731,7 +14849,7 @@
       </p:sp>
       <p:sp>
         <p:nvSpPr>
-          <p:cNvPr id="205" name="Google Shape;205;p10"/>
+          <p:cNvPr id="206" name="Google Shape;206;p10"/>
           <p:cNvSpPr txBox="1"/>
           <p:nvPr/>
         </p:nvSpPr>
@@ -14781,7 +14899,55 @@
                 <a:cs typeface="Arial"/>
                 <a:sym typeface="Arial"/>
               </a:rPr>
-              <a:t>Аналіз операцій INSERT та UPDATE показав, що наявність індексів збільшує час модифікації даних. Найбільші накладні витрати характерні для composite та covering індексів, тоді як hash- та BRIN-індекси мали менший вплив. За показниками часу побудови та розміру найменш витратними виявилися BRIN-індекси.</a:t>
+              <a:t>Аналіз операцій INSERT та UPDATE показав, що наявність індексів </a:t>
+            </a:r>
+            <a:r>
+              <a:rPr lang="uk" sz="1200"/>
+              <a:t>впливає на</a:t>
+            </a:r>
+            <a:r>
+              <a:rPr b="0" i="0" lang="uk" sz="1200" u="none" cap="none" strike="noStrike">
+                <a:solidFill>
+                  <a:srgbClr val="000000"/>
+                </a:solidFill>
+                <a:latin typeface="Arial"/>
+                <a:ea typeface="Arial"/>
+                <a:cs typeface="Arial"/>
+                <a:sym typeface="Arial"/>
+              </a:rPr>
+              <a:t> час модифікації даних. Найбільші накладні витрати характерні для composite та covering індексів, тоді як hash- та BRIN-індекси </a:t>
+            </a:r>
+            <a:r>
+              <a:rPr lang="uk" sz="1200"/>
+              <a:t>витрати зменшували</a:t>
+            </a:r>
+            <a:r>
+              <a:rPr b="0" i="0" lang="uk" sz="1200" u="none" cap="none" strike="noStrike">
+                <a:solidFill>
+                  <a:srgbClr val="000000"/>
+                </a:solidFill>
+                <a:latin typeface="Arial"/>
+                <a:ea typeface="Arial"/>
+                <a:cs typeface="Arial"/>
+                <a:sym typeface="Arial"/>
+              </a:rPr>
+              <a:t>. За показниками часу побудови та розміру найменш витратними виявилися BRIN- та </a:t>
+            </a:r>
+            <a:r>
+              <a:rPr lang="uk" sz="1200"/>
+              <a:t>hash-</a:t>
+            </a:r>
+            <a:r>
+              <a:rPr b="0" i="0" lang="uk" sz="1200" u="none" cap="none" strike="noStrike">
+                <a:solidFill>
+                  <a:srgbClr val="000000"/>
+                </a:solidFill>
+                <a:latin typeface="Arial"/>
+                <a:ea typeface="Arial"/>
+                <a:cs typeface="Arial"/>
+                <a:sym typeface="Arial"/>
+              </a:rPr>
+              <a:t>індекси.</a:t>
             </a:r>
             <a:endParaRPr b="0" i="0" sz="1200" u="none" cap="none" strike="noStrike">
               <a:solidFill>
@@ -14837,7 +15003,7 @@
       </p:sp>
       <p:pic>
         <p:nvPicPr>
-          <p:cNvPr id="206" name="Google Shape;206;p10"/>
+          <p:cNvPr id="207" name="Google Shape;207;p10"/>
           <p:cNvPicPr preferRelativeResize="0"/>
           <p:nvPr/>
         </p:nvPicPr>
@@ -14871,7 +15037,7 @@
       </p:pic>
       <p:sp>
         <p:nvSpPr>
-          <p:cNvPr id="207" name="Google Shape;207;p10"/>
+          <p:cNvPr id="208" name="Google Shape;208;p10"/>
           <p:cNvSpPr txBox="1"/>
           <p:nvPr>
             <p:ph idx="12" type="sldNum"/>
@@ -14927,7 +15093,7 @@
   <p:cSld>
     <p:spTree>
       <p:nvGrpSpPr>
-        <p:cNvPr id="211" name="Shape 211"/>
+        <p:cNvPr id="212" name="Shape 212"/>
         <p:cNvGrpSpPr/>
         <p:nvPr/>
       </p:nvGrpSpPr>
@@ -14941,7 +15107,238 @@
       </p:grpSpPr>
       <p:sp>
         <p:nvSpPr>
-          <p:cNvPr id="212" name="Google Shape;212;g3d08dcc0f4b_0_0"/>
+          <p:cNvPr id="213" name="Google Shape;213;g3e178865fe7_0_6"/>
+          <p:cNvSpPr txBox="1"/>
+          <p:nvPr>
+            <p:ph type="title"/>
+          </p:nvPr>
+        </p:nvSpPr>
+        <p:spPr>
+          <a:xfrm>
+            <a:off x="598925" y="472175"/>
+            <a:ext cx="7505700" cy="954600"/>
+          </a:xfrm>
+          <a:prstGeom prst="rect">
+            <a:avLst/>
+          </a:prstGeom>
+          <a:noFill/>
+          <a:ln>
+            <a:noFill/>
+          </a:ln>
+        </p:spPr>
+        <p:txBody>
+          <a:bodyPr anchorCtr="0" anchor="t" bIns="91425" lIns="91425" spcFirstLastPara="1" rIns="91425" wrap="square" tIns="91425">
+            <a:normAutofit/>
+          </a:bodyPr>
+          <a:lstStyle/>
+          <a:p>
+            <a:pPr indent="0" lvl="0" marL="0" rtl="0" algn="l">
+              <a:lnSpc>
+                <a:spcPct val="100000"/>
+              </a:lnSpc>
+              <a:spcBef>
+                <a:spcPts val="0"/>
+              </a:spcBef>
+              <a:spcAft>
+                <a:spcPts val="0"/>
+              </a:spcAft>
+              <a:buSzPts val="3000"/>
+              <a:buNone/>
+            </a:pPr>
+            <a:r>
+              <a:rPr lang="uk"/>
+              <a:t>Час побудови та розмір індексів</a:t>
+            </a:r>
+            <a:endParaRPr/>
+          </a:p>
+        </p:txBody>
+      </p:sp>
+      <p:sp>
+        <p:nvSpPr>
+          <p:cNvPr id="214" name="Google Shape;214;g3e178865fe7_0_6"/>
+          <p:cNvSpPr txBox="1"/>
+          <p:nvPr/>
+        </p:nvSpPr>
+        <p:spPr>
+          <a:xfrm>
+            <a:off x="478725" y="1163200"/>
+            <a:ext cx="8133900" cy="1477500"/>
+          </a:xfrm>
+          <a:prstGeom prst="rect">
+            <a:avLst/>
+          </a:prstGeom>
+          <a:noFill/>
+          <a:ln>
+            <a:noFill/>
+          </a:ln>
+        </p:spPr>
+        <p:txBody>
+          <a:bodyPr anchorCtr="0" anchor="t" bIns="91425" lIns="91425" spcFirstLastPara="1" rIns="91425" wrap="square" tIns="91425">
+            <a:spAutoFit/>
+          </a:bodyPr>
+          <a:lstStyle/>
+          <a:p>
+            <a:pPr indent="0" lvl="0" marL="0" marR="0" rtl="0" algn="just">
+              <a:lnSpc>
+                <a:spcPct val="150000"/>
+              </a:lnSpc>
+              <a:spcBef>
+                <a:spcPts val="0"/>
+              </a:spcBef>
+              <a:spcAft>
+                <a:spcPts val="0"/>
+              </a:spcAft>
+              <a:buNone/>
+            </a:pPr>
+            <a:r>
+              <a:rPr lang="uk" sz="1200"/>
+              <a:t>Додатково було проаналізовано час побудови індексів та їх фізичний розмір у базі даних. Результати показали, що зі збільшенням розміру таблиці обсяг індексних структур зростає майже пропорційно. Найбільший розмір зазвичай мали composite та covering індекси, тоді як BRIN-індекси залишалися значно компактнішими. Час побудови індексів також суттєво відрізнявся залежно від їх типу: найшвидше створювалися partial та BRIN-індекси, тоді як B-tree та composite вимагали більше часу через складнішу структуру</a:t>
+            </a:r>
+            <a:endParaRPr sz="1200"/>
+          </a:p>
+        </p:txBody>
+      </p:sp>
+      <p:sp>
+        <p:nvSpPr>
+          <p:cNvPr id="215" name="Google Shape;215;g3e178865fe7_0_6"/>
+          <p:cNvSpPr txBox="1"/>
+          <p:nvPr>
+            <p:ph idx="12" type="sldNum"/>
+          </p:nvPr>
+        </p:nvSpPr>
+        <p:spPr>
+          <a:xfrm>
+            <a:off x="8390734" y="4543668"/>
+            <a:ext cx="548700" cy="393600"/>
+          </a:xfrm>
+          <a:prstGeom prst="rect">
+            <a:avLst/>
+          </a:prstGeom>
+        </p:spPr>
+        <p:txBody>
+          <a:bodyPr anchorCtr="0" anchor="ctr" bIns="91425" lIns="91425" spcFirstLastPara="1" rIns="91425" wrap="square" tIns="91425">
+            <a:normAutofit/>
+          </a:bodyPr>
+          <a:lstStyle/>
+          <a:p>
+            <a:pPr indent="0" lvl="0" marL="0" rtl="0" algn="r">
+              <a:spcBef>
+                <a:spcPts val="0"/>
+              </a:spcBef>
+              <a:spcAft>
+                <a:spcPts val="0"/>
+              </a:spcAft>
+              <a:buClr>
+                <a:srgbClr val="000000"/>
+              </a:buClr>
+              <a:buSzPts val="1000"/>
+              <a:buFont typeface="Arial"/>
+              <a:buNone/>
+            </a:pPr>
+            <a:fld id="{00000000-1234-1234-1234-123412341234}" type="slidenum">
+              <a:rPr lang="uk"/>
+              <a:t>‹#›</a:t>
+            </a:fld>
+            <a:endParaRPr/>
+          </a:p>
+        </p:txBody>
+      </p:sp>
+      <p:pic>
+        <p:nvPicPr>
+          <p:cNvPr id="216" name="Google Shape;216;g3e178865fe7_0_6"/>
+          <p:cNvPicPr preferRelativeResize="0"/>
+          <p:nvPr/>
+        </p:nvPicPr>
+        <p:blipFill>
+          <a:blip r:embed="rId3">
+            <a:alphaModFix/>
+          </a:blip>
+          <a:stretch>
+            <a:fillRect/>
+          </a:stretch>
+        </p:blipFill>
+        <p:spPr>
+          <a:xfrm>
+            <a:off x="366000" y="2640700"/>
+            <a:ext cx="4079723" cy="2227625"/>
+          </a:xfrm>
+          <a:prstGeom prst="rect">
+            <a:avLst/>
+          </a:prstGeom>
+          <a:noFill/>
+          <a:ln cap="flat" cmpd="sng" w="12700">
+            <a:solidFill>
+              <a:srgbClr val="000000"/>
+            </a:solidFill>
+            <a:prstDash val="solid"/>
+            <a:miter lim="8000"/>
+            <a:headEnd len="sm" w="sm" type="none"/>
+            <a:tailEnd len="sm" w="sm" type="none"/>
+          </a:ln>
+        </p:spPr>
+      </p:pic>
+      <p:pic>
+        <p:nvPicPr>
+          <p:cNvPr id="217" name="Google Shape;217;g3e178865fe7_0_6"/>
+          <p:cNvPicPr preferRelativeResize="0"/>
+          <p:nvPr/>
+        </p:nvPicPr>
+        <p:blipFill>
+          <a:blip r:embed="rId4">
+            <a:alphaModFix/>
+          </a:blip>
+          <a:stretch>
+            <a:fillRect/>
+          </a:stretch>
+        </p:blipFill>
+        <p:spPr>
+          <a:xfrm>
+            <a:off x="4507952" y="2640700"/>
+            <a:ext cx="4079725" cy="2227625"/>
+          </a:xfrm>
+          <a:prstGeom prst="rect">
+            <a:avLst/>
+          </a:prstGeom>
+          <a:noFill/>
+          <a:ln cap="flat" cmpd="sng" w="12700">
+            <a:solidFill>
+              <a:srgbClr val="000000"/>
+            </a:solidFill>
+            <a:prstDash val="solid"/>
+            <a:miter lim="8000"/>
+            <a:headEnd len="sm" w="sm" type="none"/>
+            <a:tailEnd len="sm" w="sm" type="none"/>
+          </a:ln>
+        </p:spPr>
+      </p:pic>
+    </p:spTree>
+  </p:cSld>
+  <p:clrMapOvr>
+    <a:masterClrMapping/>
+  </p:clrMapOvr>
+</p:sld>
+</file>
+
+<file path=ppt/slides/slide12.xml><?xml version="1.0" encoding="utf-8"?>
+<p:sld xmlns:a="http://schemas.openxmlformats.org/drawingml/2006/main" xmlns:r="http://schemas.openxmlformats.org/officeDocument/2006/relationships" xmlns:mc="http://schemas.openxmlformats.org/markup-compatibility/2006" xmlns:mv="urn:schemas-microsoft-com:mac:vml" xmlns:p="http://schemas.openxmlformats.org/presentationml/2006/main" xmlns:c="http://schemas.openxmlformats.org/drawingml/2006/chart" xmlns:dgm="http://schemas.openxmlformats.org/drawingml/2006/diagram" xmlns:o="urn:schemas-microsoft-com:office:office" xmlns:v="urn:schemas-microsoft-com:vml" xmlns:pvml="urn:schemas-microsoft-com:office:powerpoint" xmlns:com="http://schemas.openxmlformats.org/drawingml/2006/compatibility" xmlns:p14="http://schemas.microsoft.com/office/powerpoint/2010/main" xmlns:p15="http://schemas.microsoft.com/office/powerpoint/2012/main" xmlns:ahyp="http://schemas.microsoft.com/office/drawing/2018/hyperlinkcolor">
+  <p:cSld>
+    <p:spTree>
+      <p:nvGrpSpPr>
+        <p:cNvPr id="221" name="Shape 221"/>
+        <p:cNvGrpSpPr/>
+        <p:nvPr/>
+      </p:nvGrpSpPr>
+      <p:grpSpPr>
+        <a:xfrm>
+          <a:off x="0" y="0"/>
+          <a:ext cx="0" cy="0"/>
+          <a:chOff x="0" y="0"/>
+          <a:chExt cx="0" cy="0"/>
+        </a:xfrm>
+      </p:grpSpPr>
+      <p:sp>
+        <p:nvSpPr>
+          <p:cNvPr id="222" name="Google Shape;222;g3d08dcc0f4b_0_0"/>
           <p:cNvSpPr txBox="1"/>
           <p:nvPr>
             <p:ph type="title"/>
@@ -14981,7 +15378,7 @@
       </p:sp>
       <p:sp>
         <p:nvSpPr>
-          <p:cNvPr id="213" name="Google Shape;213;g3d08dcc0f4b_0_0"/>
+          <p:cNvPr id="223" name="Google Shape;223;g3d08dcc0f4b_0_0"/>
           <p:cNvSpPr txBox="1"/>
           <p:nvPr/>
         </p:nvSpPr>
@@ -15026,7 +15423,7 @@
       </p:sp>
       <p:pic>
         <p:nvPicPr>
-          <p:cNvPr id="214" name="Google Shape;214;g3d08dcc0f4b_0_0"/>
+          <p:cNvPr id="224" name="Google Shape;224;g3d08dcc0f4b_0_0"/>
           <p:cNvPicPr preferRelativeResize="0"/>
           <p:nvPr/>
         </p:nvPicPr>
@@ -15060,7 +15457,7 @@
       </p:pic>
       <p:sp>
         <p:nvSpPr>
-          <p:cNvPr id="215" name="Google Shape;215;g3d08dcc0f4b_0_0"/>
+          <p:cNvPr id="225" name="Google Shape;225;g3d08dcc0f4b_0_0"/>
           <p:cNvSpPr txBox="1"/>
           <p:nvPr>
             <p:ph idx="12" type="sldNum"/>
@@ -15111,12 +15508,12 @@
 </p:sld>
 </file>
 
-<file path=ppt/slides/slide12.xml><?xml version="1.0" encoding="utf-8"?>
+<file path=ppt/slides/slide13.xml><?xml version="1.0" encoding="utf-8"?>
 <p:sld xmlns:a="http://schemas.openxmlformats.org/drawingml/2006/main" xmlns:r="http://schemas.openxmlformats.org/officeDocument/2006/relationships" xmlns:mc="http://schemas.openxmlformats.org/markup-compatibility/2006" xmlns:mv="urn:schemas-microsoft-com:mac:vml" xmlns:p="http://schemas.openxmlformats.org/presentationml/2006/main" xmlns:c="http://schemas.openxmlformats.org/drawingml/2006/chart" xmlns:dgm="http://schemas.openxmlformats.org/drawingml/2006/diagram" xmlns:o="urn:schemas-microsoft-com:office:office" xmlns:v="urn:schemas-microsoft-com:vml" xmlns:pvml="urn:schemas-microsoft-com:office:powerpoint" xmlns:com="http://schemas.openxmlformats.org/drawingml/2006/compatibility" xmlns:p14="http://schemas.microsoft.com/office/powerpoint/2010/main" xmlns:p15="http://schemas.microsoft.com/office/powerpoint/2012/main" xmlns:ahyp="http://schemas.microsoft.com/office/drawing/2018/hyperlinkcolor">
   <p:cSld>
     <p:spTree>
       <p:nvGrpSpPr>
-        <p:cNvPr id="219" name="Shape 219"/>
+        <p:cNvPr id="229" name="Shape 229"/>
         <p:cNvGrpSpPr/>
         <p:nvPr/>
       </p:nvGrpSpPr>
@@ -15130,7 +15527,7 @@
       </p:grpSpPr>
       <p:sp>
         <p:nvSpPr>
-          <p:cNvPr id="220" name="Google Shape;220;g3d08dcc0f4b_0_8"/>
+          <p:cNvPr id="230" name="Google Shape;230;g3d08dcc0f4b_0_8"/>
           <p:cNvSpPr txBox="1"/>
           <p:nvPr>
             <p:ph type="title"/>
@@ -15170,7 +15567,7 @@
       </p:sp>
       <p:sp>
         <p:nvSpPr>
-          <p:cNvPr id="221" name="Google Shape;221;g3d08dcc0f4b_0_8"/>
+          <p:cNvPr id="231" name="Google Shape;231;g3d08dcc0f4b_0_8"/>
           <p:cNvSpPr txBox="1"/>
           <p:nvPr/>
         </p:nvSpPr>
@@ -15215,7 +15612,7 @@
       </p:sp>
       <p:pic>
         <p:nvPicPr>
-          <p:cNvPr id="222" name="Google Shape;222;g3d08dcc0f4b_0_8"/>
+          <p:cNvPr id="232" name="Google Shape;232;g3d08dcc0f4b_0_8"/>
           <p:cNvPicPr preferRelativeResize="0"/>
           <p:nvPr/>
         </p:nvPicPr>
@@ -15249,7 +15646,7 @@
       </p:pic>
       <p:sp>
         <p:nvSpPr>
-          <p:cNvPr id="223" name="Google Shape;223;g3d08dcc0f4b_0_8"/>
+          <p:cNvPr id="233" name="Google Shape;233;g3d08dcc0f4b_0_8"/>
           <p:cNvSpPr txBox="1"/>
           <p:nvPr>
             <p:ph idx="12" type="sldNum"/>
@@ -15300,12 +15697,12 @@
 </p:sld>
 </file>
 
-<file path=ppt/slides/slide13.xml><?xml version="1.0" encoding="utf-8"?>
+<file path=ppt/slides/slide14.xml><?xml version="1.0" encoding="utf-8"?>
 <p:sld xmlns:a="http://schemas.openxmlformats.org/drawingml/2006/main" xmlns:r="http://schemas.openxmlformats.org/officeDocument/2006/relationships" xmlns:mc="http://schemas.openxmlformats.org/markup-compatibility/2006" xmlns:mv="urn:schemas-microsoft-com:mac:vml" xmlns:p="http://schemas.openxmlformats.org/presentationml/2006/main" xmlns:c="http://schemas.openxmlformats.org/drawingml/2006/chart" xmlns:dgm="http://schemas.openxmlformats.org/drawingml/2006/diagram" xmlns:o="urn:schemas-microsoft-com:office:office" xmlns:v="urn:schemas-microsoft-com:vml" xmlns:pvml="urn:schemas-microsoft-com:office:powerpoint" xmlns:com="http://schemas.openxmlformats.org/drawingml/2006/compatibility" xmlns:p14="http://schemas.microsoft.com/office/powerpoint/2010/main" xmlns:p15="http://schemas.microsoft.com/office/powerpoint/2012/main" xmlns:ahyp="http://schemas.microsoft.com/office/drawing/2018/hyperlinkcolor">
   <p:cSld>
     <p:spTree>
       <p:nvGrpSpPr>
-        <p:cNvPr id="227" name="Shape 227"/>
+        <p:cNvPr id="237" name="Shape 237"/>
         <p:cNvGrpSpPr/>
         <p:nvPr/>
       </p:nvGrpSpPr>
@@ -15319,7 +15716,7 @@
       </p:grpSpPr>
       <p:sp>
         <p:nvSpPr>
-          <p:cNvPr id="228" name="Google Shape;228;p11"/>
+          <p:cNvPr id="238" name="Google Shape;238;p11"/>
           <p:cNvSpPr txBox="1"/>
           <p:nvPr>
             <p:ph type="title"/>
@@ -15367,7 +15764,7 @@
       </p:sp>
       <p:sp>
         <p:nvSpPr>
-          <p:cNvPr id="229" name="Google Shape;229;p11"/>
+          <p:cNvPr id="239" name="Google Shape;239;p11"/>
           <p:cNvSpPr txBox="1"/>
           <p:nvPr/>
         </p:nvSpPr>
@@ -15433,7 +15830,7 @@
       </p:sp>
       <p:sp>
         <p:nvSpPr>
-          <p:cNvPr id="230" name="Google Shape;230;p11"/>
+          <p:cNvPr id="240" name="Google Shape;240;p11"/>
           <p:cNvSpPr txBox="1"/>
           <p:nvPr>
             <p:ph idx="12" type="sldNum"/>
@@ -15484,12 +15881,12 @@
 </p:sld>
 </file>
 
-<file path=ppt/slides/slide14.xml><?xml version="1.0" encoding="utf-8"?>
+<file path=ppt/slides/slide15.xml><?xml version="1.0" encoding="utf-8"?>
 <p:sld xmlns:a="http://schemas.openxmlformats.org/drawingml/2006/main" xmlns:r="http://schemas.openxmlformats.org/officeDocument/2006/relationships" xmlns:mc="http://schemas.openxmlformats.org/markup-compatibility/2006" xmlns:mv="urn:schemas-microsoft-com:mac:vml" xmlns:p="http://schemas.openxmlformats.org/presentationml/2006/main" xmlns:c="http://schemas.openxmlformats.org/drawingml/2006/chart" xmlns:dgm="http://schemas.openxmlformats.org/drawingml/2006/diagram" xmlns:o="urn:schemas-microsoft-com:office:office" xmlns:v="urn:schemas-microsoft-com:vml" xmlns:pvml="urn:schemas-microsoft-com:office:powerpoint" xmlns:com="http://schemas.openxmlformats.org/drawingml/2006/compatibility" xmlns:p14="http://schemas.microsoft.com/office/powerpoint/2010/main" xmlns:p15="http://schemas.microsoft.com/office/powerpoint/2012/main" xmlns:ahyp="http://schemas.microsoft.com/office/drawing/2018/hyperlinkcolor">
   <p:cSld>
     <p:spTree>
       <p:nvGrpSpPr>
-        <p:cNvPr id="234" name="Shape 234"/>
+        <p:cNvPr id="244" name="Shape 244"/>
         <p:cNvGrpSpPr/>
         <p:nvPr/>
       </p:nvGrpSpPr>
@@ -15503,7 +15900,7 @@
       </p:grpSpPr>
       <p:sp>
         <p:nvSpPr>
-          <p:cNvPr id="235" name="Google Shape;235;p12"/>
+          <p:cNvPr id="245" name="Google Shape;245;p12"/>
           <p:cNvSpPr txBox="1"/>
           <p:nvPr>
             <p:ph type="title"/>
@@ -15551,7 +15948,7 @@
       </p:sp>
       <p:sp>
         <p:nvSpPr>
-          <p:cNvPr id="236" name="Google Shape;236;p12"/>
+          <p:cNvPr id="246" name="Google Shape;246;p12"/>
           <p:cNvSpPr txBox="1"/>
           <p:nvPr>
             <p:ph idx="12" type="sldNum"/>
@@ -15934,7 +16331,23 @@
                 <a:cs typeface="Arial"/>
                 <a:sym typeface="Arial"/>
               </a:rPr>
-              <a:t>Реляційні СУБД, зокрема PostgreSQL, підтримують різні типи індексів, серед яких B-tree, Hash, GIN, GiST та BRIN, кожен з яких оптимальний для певних типів даних і запитів. Вибір індексу є компромісом між прискоренням вибірки та накладними витратами на зберігання й оновлення даних. Тому обґрунтований підбір індексів потребує експериментальної оцінки з урахуванням характеру навантаження та реальних сценаріїв використання.</a:t>
+              <a:t>Реляційні СУБД, зокрема PostgreSQL, підтримують різні типи індексів, серед яких B-tree, Hash, </a:t>
+            </a:r>
+            <a:r>
+              <a:rPr lang="uk" sz="1500"/>
+              <a:t>Partial </a:t>
+            </a:r>
+            <a:r>
+              <a:rPr b="0" i="0" lang="uk" sz="1500" u="none" cap="none" strike="noStrike">
+                <a:solidFill>
+                  <a:srgbClr val="000000"/>
+                </a:solidFill>
+                <a:latin typeface="Arial"/>
+                <a:ea typeface="Arial"/>
+                <a:cs typeface="Arial"/>
+                <a:sym typeface="Arial"/>
+              </a:rPr>
+              <a:t>та BRIN, кожен з яких оптимальний для певних типів даних і запитів. Вибір індексу є компромісом між прискоренням вибірки та накладними витратами на зберігання й оновлення даних. Тому обґрунтований підбір індексів потребує експериментальної оцінки з урахуванням характеру навантаження та реальних сценаріїв використання.</a:t>
             </a:r>
             <a:endParaRPr b="0" i="0" sz="1500" u="none" cap="none" strike="noStrike">
               <a:solidFill>
@@ -16357,7 +16770,7 @@
         <p:spPr>
           <a:xfrm>
             <a:off x="322050" y="1274775"/>
-            <a:ext cx="8499900" cy="3463200"/>
+            <a:ext cx="8499900" cy="3809700"/>
           </a:xfrm>
           <a:prstGeom prst="rect">
             <a:avLst/>
@@ -16431,26 +16844,10 @@
               <a:buNone/>
             </a:pPr>
             <a:r>
-              <a:rPr b="0" i="0" lang="uk" sz="1500" u="none" cap="none" strike="noStrike">
-                <a:solidFill>
-                  <a:srgbClr val="000000"/>
-                </a:solidFill>
-                <a:latin typeface="Arial"/>
-                <a:ea typeface="Arial"/>
-                <a:cs typeface="Arial"/>
-                <a:sym typeface="Arial"/>
-              </a:rPr>
-              <a:t>Кваліфікаційні роботи, виконані в ХНУРЕ (Р. Рамазанов, М. Кравець), демонструють практичну залежність ефективності індексів від обсягу даних і характеру навантаження. Аналіз джерел підтверджує відсутність універсального рішення та обґрунтовує необхідність експериментального порівняння різних типів індексів у PostgreSQL за єдиною методикою.</a:t>
+              <a:rPr lang="uk" sz="1500"/>
+              <a:t>Сучасні роботи 2024 року, зокрема В. Гужова, К. Смєлякова, І. Кириченка та Г. Терещенка, опубліковані у виданнях IEEE, демонструють специфіку індексування для Big Data та сучасних програмних стеків (наприклад, Spring Boot). Аналіз цих джерел обґрунтовує необхідність експериментального порівняння різних типів індексів у PostgreSQL за єдиною методикою </a:t>
             </a:r>
-            <a:endParaRPr b="0" i="0" sz="1500" u="none" cap="none" strike="noStrike">
-              <a:solidFill>
-                <a:srgbClr val="000000"/>
-              </a:solidFill>
-              <a:latin typeface="Arial"/>
-              <a:ea typeface="Arial"/>
-              <a:cs typeface="Arial"/>
-              <a:sym typeface="Arial"/>
-            </a:endParaRPr>
+            <a:endParaRPr sz="1500"/>
           </a:p>
           <a:p>
             <a:pPr indent="0" lvl="0" marL="0" marR="0" rtl="0" algn="just">
@@ -17563,7 +17960,7 @@
         </p:nvSpPr>
         <p:spPr>
           <a:xfrm>
-            <a:off x="598925" y="548775"/>
+            <a:off x="580975" y="360075"/>
             <a:ext cx="7505700" cy="954600"/>
           </a:xfrm>
           <a:prstGeom prst="rect">
@@ -17609,8 +18006,8 @@
         </p:nvSpPr>
         <p:spPr>
           <a:xfrm>
-            <a:off x="315950" y="1321325"/>
-            <a:ext cx="4465500" cy="3570900"/>
+            <a:off x="298000" y="990275"/>
+            <a:ext cx="8306400" cy="1908600"/>
           </a:xfrm>
           <a:prstGeom prst="rect">
             <a:avLst/>
@@ -17707,43 +18104,9 @@
           </a:p>
         </p:txBody>
       </p:sp>
-      <p:pic>
-        <p:nvPicPr>
-          <p:cNvPr id="190" name="Google Shape;190;p8"/>
-          <p:cNvPicPr preferRelativeResize="0"/>
-          <p:nvPr/>
-        </p:nvPicPr>
-        <p:blipFill>
-          <a:blip r:embed="rId3">
-            <a:alphaModFix/>
-          </a:blip>
-          <a:stretch>
-            <a:fillRect/>
-          </a:stretch>
-        </p:blipFill>
-        <p:spPr>
-          <a:xfrm>
-            <a:off x="4781450" y="1655975"/>
-            <a:ext cx="4051975" cy="2486250"/>
-          </a:xfrm>
-          <a:prstGeom prst="rect">
-            <a:avLst/>
-          </a:prstGeom>
-          <a:noFill/>
-          <a:ln cap="flat" cmpd="sng" w="12700">
-            <a:solidFill>
-              <a:srgbClr val="000000"/>
-            </a:solidFill>
-            <a:prstDash val="solid"/>
-            <a:miter lim="8000"/>
-            <a:headEnd len="sm" w="sm" type="none"/>
-            <a:tailEnd len="sm" w="sm" type="none"/>
-          </a:ln>
-        </p:spPr>
-      </p:pic>
       <p:sp>
         <p:nvSpPr>
-          <p:cNvPr id="191" name="Google Shape;191;p8"/>
+          <p:cNvPr id="190" name="Google Shape;190;p8"/>
           <p:cNvSpPr txBox="1"/>
           <p:nvPr>
             <p:ph idx="12" type="sldNum"/>
@@ -17786,6 +18149,74 @@
           </a:p>
         </p:txBody>
       </p:sp>
+      <p:pic>
+        <p:nvPicPr>
+          <p:cNvPr id="191" name="Google Shape;191;p8"/>
+          <p:cNvPicPr preferRelativeResize="0"/>
+          <p:nvPr/>
+        </p:nvPicPr>
+        <p:blipFill>
+          <a:blip r:embed="rId3">
+            <a:alphaModFix/>
+          </a:blip>
+          <a:stretch>
+            <a:fillRect/>
+          </a:stretch>
+        </p:blipFill>
+        <p:spPr>
+          <a:xfrm>
+            <a:off x="355900" y="2898875"/>
+            <a:ext cx="3917425" cy="1994075"/>
+          </a:xfrm>
+          <a:prstGeom prst="rect">
+            <a:avLst/>
+          </a:prstGeom>
+          <a:noFill/>
+          <a:ln cap="flat" cmpd="sng" w="12700">
+            <a:solidFill>
+              <a:srgbClr val="000000"/>
+            </a:solidFill>
+            <a:prstDash val="solid"/>
+            <a:miter lim="8000"/>
+            <a:headEnd len="sm" w="sm" type="none"/>
+            <a:tailEnd len="sm" w="sm" type="none"/>
+          </a:ln>
+        </p:spPr>
+      </p:pic>
+      <p:pic>
+        <p:nvPicPr>
+          <p:cNvPr id="192" name="Google Shape;192;p8"/>
+          <p:cNvPicPr preferRelativeResize="0"/>
+          <p:nvPr/>
+        </p:nvPicPr>
+        <p:blipFill>
+          <a:blip r:embed="rId4">
+            <a:alphaModFix/>
+          </a:blip>
+          <a:stretch>
+            <a:fillRect/>
+          </a:stretch>
+        </p:blipFill>
+        <p:spPr>
+          <a:xfrm>
+            <a:off x="4425450" y="2898875"/>
+            <a:ext cx="4080200" cy="1994075"/>
+          </a:xfrm>
+          <a:prstGeom prst="rect">
+            <a:avLst/>
+          </a:prstGeom>
+          <a:noFill/>
+          <a:ln cap="flat" cmpd="sng" w="12700">
+            <a:solidFill>
+              <a:srgbClr val="000000"/>
+            </a:solidFill>
+            <a:prstDash val="solid"/>
+            <a:miter lim="8000"/>
+            <a:headEnd len="sm" w="sm" type="none"/>
+            <a:tailEnd len="sm" w="sm" type="none"/>
+          </a:ln>
+        </p:spPr>
+      </p:pic>
     </p:spTree>
   </p:cSld>
   <p:clrMapOvr>
@@ -17799,7 +18230,7 @@
   <p:cSld>
     <p:spTree>
       <p:nvGrpSpPr>
-        <p:cNvPr id="195" name="Shape 195"/>
+        <p:cNvPr id="196" name="Shape 196"/>
         <p:cNvGrpSpPr/>
         <p:nvPr/>
       </p:nvGrpSpPr>
@@ -17813,7 +18244,7 @@
       </p:grpSpPr>
       <p:sp>
         <p:nvSpPr>
-          <p:cNvPr id="196" name="Google Shape;196;p9"/>
+          <p:cNvPr id="197" name="Google Shape;197;p9"/>
           <p:cNvSpPr txBox="1"/>
           <p:nvPr>
             <p:ph type="title"/>
@@ -17861,7 +18292,7 @@
       </p:sp>
       <p:sp>
         <p:nvSpPr>
-          <p:cNvPr id="197" name="Google Shape;197;p9"/>
+          <p:cNvPr id="198" name="Google Shape;198;p9"/>
           <p:cNvSpPr txBox="1"/>
           <p:nvPr/>
         </p:nvSpPr>
@@ -17967,7 +18398,7 @@
       </p:sp>
       <p:pic>
         <p:nvPicPr>
-          <p:cNvPr id="198" name="Google Shape;198;p9"/>
+          <p:cNvPr id="199" name="Google Shape;199;p9"/>
           <p:cNvPicPr preferRelativeResize="0"/>
           <p:nvPr/>
         </p:nvPicPr>
@@ -18001,7 +18432,7 @@
       </p:pic>
       <p:sp>
         <p:nvSpPr>
-          <p:cNvPr id="199" name="Google Shape;199;p9"/>
+          <p:cNvPr id="200" name="Google Shape;200;p9"/>
           <p:cNvSpPr txBox="1"/>
           <p:nvPr>
             <p:ph idx="12" type="sldNum"/>
